--- a/4_Professional_Certificate_Materials/PCert_Cohort_Slides_8_Weeks.pptx
+++ b/4_Professional_Certificate_Materials/PCert_Cohort_Slides_8_Weeks.pptx
@@ -8,6 +8,7 @@
     <p:sldId id="256" r:id="rId2"/>
     <p:sldId id="257" r:id="rId3"/>
     <p:sldId id="258" r:id="rId4"/>
+    <p:sldId id="287" r:id="rId38"/>
     <p:sldId id="259" r:id="rId5"/>
     <p:sldId id="260" r:id="rId6"/>
     <p:sldId id="261" r:id="rId7"/>
@@ -3853,6 +3854,562 @@
 
 <file path=ppt/slides/slide10.xml><?xml version="1.0" encoding="utf-8"?>
 <p:sld xmlns:a="http://schemas.openxmlformats.org/drawingml/2006/main" xmlns:r="http://schemas.openxmlformats.org/officeDocument/2006/relationships" xmlns:p="http://schemas.openxmlformats.org/presentationml/2006/main">
+  <p:cSld name="Slide 9">
+    <p:bg>
+      <p:bgPr>
+        <a:solidFill>
+          <a:srgbClr val="FFFFFF"/>
+        </a:solidFill>
+      </p:bgPr>
+    </p:bg>
+    <p:spTree>
+      <p:nvGrpSpPr>
+        <p:cNvPr id="1" name=""/>
+        <p:cNvGrpSpPr/>
+        <p:nvPr/>
+      </p:nvGrpSpPr>
+      <p:grpSpPr>
+        <a:xfrm>
+          <a:off x="0" y="0"/>
+          <a:ext cx="0" cy="0"/>
+          <a:chOff x="0" y="0"/>
+          <a:chExt cx="0" cy="0"/>
+        </a:xfrm>
+      </p:grpSpPr>
+      <p:sp>
+        <p:nvSpPr>
+          <p:cNvPr id="2" name="Text 0"/>
+          <p:cNvSpPr/>
+          <p:nvPr/>
+        </p:nvSpPr>
+        <p:spPr>
+          <a:xfrm>
+            <a:off x="566928" y="457200"/>
+            <a:ext cx="11057839" cy="292608"/>
+          </a:xfrm>
+          <a:prstGeom prst="rect">
+            <a:avLst/>
+          </a:prstGeom>
+          <a:noFill/>
+          <a:ln/>
+        </p:spPr>
+        <p:txBody>
+          <a:bodyPr wrap="square" rtlCol="0" anchor="ctr"/>
+          <a:lstStyle/>
+          <a:p>
+            <a:pPr indent="0" marL="0">
+              <a:buNone/>
+            </a:pPr>
+            <a:r>
+              <a:rPr lang="en-US" sz="1050" b="1" spc="100" kern="0" dirty="0">
+                <a:solidFill>
+                  <a:srgbClr val="8A8378"/>
+                </a:solidFill>
+                <a:latin typeface="Georgia" pitchFamily="34" charset="0"/>
+                <a:ea typeface="Georgia" pitchFamily="34" charset="-122"/>
+                <a:cs typeface="Georgia" pitchFamily="34" charset="-120"/>
+              </a:rPr>
+              <a:t>THE CUSTODY ARCHITECT’S CLINICAL METHOD</a:t>
+            </a:r>
+            <a:endParaRPr lang="en-US" sz="1150" dirty="0"/>
+          </a:p>
+        </p:txBody>
+      </p:sp>
+      <p:sp>
+        <p:nvSpPr>
+          <p:cNvPr id="3" name="Text 1"/>
+          <p:cNvSpPr/>
+          <p:nvPr/>
+        </p:nvSpPr>
+        <p:spPr>
+          <a:xfrm>
+            <a:off x="566928" y="749808"/>
+            <a:ext cx="11057839" cy="822960"/>
+          </a:xfrm>
+          <a:prstGeom prst="rect">
+            <a:avLst/>
+          </a:prstGeom>
+          <a:noFill/>
+          <a:ln/>
+        </p:spPr>
+        <p:txBody>
+          <a:bodyPr wrap="square" rtlCol="0" anchor="ctr"/>
+          <a:lstStyle/>
+          <a:p>
+            <a:pPr indent="0" marL="0">
+              <a:buNone/>
+            </a:pPr>
+            <a:r>
+              <a:rPr lang="en-US" sz="2450" b="1" dirty="0">
+                <a:solidFill>
+                  <a:srgbClr val="1B1A18"/>
+                </a:solidFill>
+                <a:latin typeface="Georgia" pitchFamily="34" charset="0"/>
+                <a:ea typeface="Georgia" pitchFamily="34" charset="-122"/>
+                <a:cs typeface="Georgia" pitchFamily="34" charset="-120"/>
+              </a:rPr>
+              <a:t>Diagnose by damage</a:t>
+            </a:r>
+            <a:endParaRPr lang="en-US" sz="2450" dirty="0"/>
+          </a:p>
+        </p:txBody>
+      </p:sp>
+      <p:sp>
+        <p:nvSpPr>
+          <p:cNvPr id="4" name="Shape 2"/>
+          <p:cNvSpPr/>
+          <p:nvPr/>
+        </p:nvSpPr>
+        <p:spPr>
+          <a:xfrm>
+            <a:off x="566928" y="1691640"/>
+            <a:ext cx="457200" cy="457200"/>
+          </a:xfrm>
+          <a:prstGeom prst="ellipse">
+            <a:avLst/>
+          </a:prstGeom>
+          <a:solidFill>
+            <a:srgbClr val="8A8378"/>
+          </a:solidFill>
+          <a:ln/>
+        </p:spPr>
+      </p:sp>
+      <p:sp>
+        <p:nvSpPr>
+          <p:cNvPr id="5" name="Text 3"/>
+          <p:cNvSpPr/>
+          <p:nvPr/>
+        </p:nvSpPr>
+        <p:spPr>
+          <a:xfrm>
+            <a:off x="566928" y="1691640"/>
+            <a:ext cx="457200" cy="457200"/>
+          </a:xfrm>
+          <a:prstGeom prst="rect">
+            <a:avLst/>
+          </a:prstGeom>
+          <a:noFill/>
+          <a:ln/>
+        </p:spPr>
+        <p:txBody>
+          <a:bodyPr wrap="square" rtlCol="0" anchor="ctr"/>
+          <a:lstStyle/>
+          <a:p>
+            <a:pPr algn="ctr" indent="0" marL="0">
+              <a:buNone/>
+            </a:pPr>
+            <a:r>
+              <a:rPr lang="en-US" sz="1400" b="1" dirty="0">
+                <a:solidFill>
+                  <a:srgbClr val="FFFFFF"/>
+                </a:solidFill>
+                <a:latin typeface="Georgia" pitchFamily="34" charset="0"/>
+                <a:ea typeface="Georgia" pitchFamily="34" charset="-122"/>
+                <a:cs typeface="Georgia" pitchFamily="34" charset="-120"/>
+              </a:rPr>
+              <a:t>1</a:t>
+            </a:r>
+            <a:endParaRPr lang="en-US" sz="1400" dirty="0"/>
+          </a:p>
+        </p:txBody>
+      </p:sp>
+      <p:sp>
+        <p:nvSpPr>
+          <p:cNvPr id="6" name="Text 4"/>
+          <p:cNvSpPr/>
+          <p:nvPr/>
+        </p:nvSpPr>
+        <p:spPr>
+          <a:xfrm>
+            <a:off x="1234440" y="1636776"/>
+            <a:ext cx="10280599" cy="1444752"/>
+          </a:xfrm>
+          <a:prstGeom prst="rect">
+            <a:avLst/>
+          </a:prstGeom>
+          <a:noFill/>
+          <a:ln/>
+        </p:spPr>
+        <p:txBody>
+          <a:bodyPr wrap="square" rtlCol="0" anchor="t"/>
+          <a:lstStyle/>
+          <a:p>
+            <a:pPr indent="0" marL="0">
+              <a:lnSpc>
+                <a:spcPct val="112000"/>
+              </a:lnSpc>
+              <a:buNone/>
+            </a:pPr>
+            <a:r>
+              <a:rPr lang="en-US" sz="1450" b="1" dirty="0">
+                <a:solidFill>
+                  <a:srgbClr val="33302B"/>
+                </a:solidFill>
+                <a:latin typeface="Georgia" pitchFamily="34" charset="0"/>
+                <a:ea typeface="Georgia" pitchFamily="34" charset="-122"/>
+                <a:cs typeface="Georgia" pitchFamily="34" charset="-120"/>
+              </a:rPr>
+              <a:t>Start from the symptom, not the cause you assume.   </a:t>
+            </a:r>
+            <a:pPr indent="0" marL="0">
+              <a:lnSpc>
+                <a:spcPct val="112000"/>
+              </a:lnSpc>
+              <a:buNone/>
+            </a:pPr>
+            <a:r>
+              <a:rPr lang="en-US" sz="1250" dirty="0">
+                <a:solidFill>
+                  <a:srgbClr val="6E6A62"/>
+                </a:solidFill>
+                <a:latin typeface="Georgia" pitchFamily="34" charset="0"/>
+                <a:ea typeface="Georgia" pitchFamily="34" charset="-122"/>
+                <a:cs typeface="Georgia" pitchFamily="34" charset="-120"/>
+              </a:rPr>
+              <a:t>‘A number meant the wrong thing’ → context, before you blame a person.</a:t>
+            </a:r>
+            <a:endParaRPr lang="en-US" sz="1450" dirty="0"/>
+          </a:p>
+        </p:txBody>
+      </p:sp>
+      <p:sp>
+        <p:nvSpPr>
+          <p:cNvPr id="7" name="Shape 5"/>
+          <p:cNvSpPr/>
+          <p:nvPr/>
+        </p:nvSpPr>
+        <p:spPr>
+          <a:xfrm>
+            <a:off x="566928" y="3246120"/>
+            <a:ext cx="457200" cy="457200"/>
+          </a:xfrm>
+          <a:prstGeom prst="ellipse">
+            <a:avLst/>
+          </a:prstGeom>
+          <a:solidFill>
+            <a:srgbClr val="8A8378"/>
+          </a:solidFill>
+          <a:ln/>
+        </p:spPr>
+      </p:sp>
+      <p:sp>
+        <p:nvSpPr>
+          <p:cNvPr id="8" name="Text 6"/>
+          <p:cNvSpPr/>
+          <p:nvPr/>
+        </p:nvSpPr>
+        <p:spPr>
+          <a:xfrm>
+            <a:off x="566928" y="3246120"/>
+            <a:ext cx="457200" cy="457200"/>
+          </a:xfrm>
+          <a:prstGeom prst="rect">
+            <a:avLst/>
+          </a:prstGeom>
+          <a:noFill/>
+          <a:ln/>
+        </p:spPr>
+        <p:txBody>
+          <a:bodyPr wrap="square" rtlCol="0" anchor="ctr"/>
+          <a:lstStyle/>
+          <a:p>
+            <a:pPr algn="ctr" indent="0" marL="0">
+              <a:buNone/>
+            </a:pPr>
+            <a:r>
+              <a:rPr lang="en-US" sz="1400" b="1" dirty="0">
+                <a:solidFill>
+                  <a:srgbClr val="FFFFFF"/>
+                </a:solidFill>
+                <a:latin typeface="Georgia" pitchFamily="34" charset="0"/>
+                <a:ea typeface="Georgia" pitchFamily="34" charset="-122"/>
+                <a:cs typeface="Georgia" pitchFamily="34" charset="-120"/>
+              </a:rPr>
+              <a:t>2</a:t>
+            </a:r>
+            <a:endParaRPr lang="en-US" sz="1400" dirty="0"/>
+          </a:p>
+        </p:txBody>
+      </p:sp>
+      <p:sp>
+        <p:nvSpPr>
+          <p:cNvPr id="9" name="Text 7"/>
+          <p:cNvSpPr/>
+          <p:nvPr/>
+        </p:nvSpPr>
+        <p:spPr>
+          <a:xfrm>
+            <a:off x="1234440" y="3191256"/>
+            <a:ext cx="10280599" cy="1444752"/>
+          </a:xfrm>
+          <a:prstGeom prst="rect">
+            <a:avLst/>
+          </a:prstGeom>
+          <a:noFill/>
+          <a:ln/>
+        </p:spPr>
+        <p:txBody>
+          <a:bodyPr wrap="square" rtlCol="0" anchor="t"/>
+          <a:lstStyle/>
+          <a:p>
+            <a:pPr indent="0" marL="0">
+              <a:lnSpc>
+                <a:spcPct val="112000"/>
+              </a:lnSpc>
+              <a:buNone/>
+            </a:pPr>
+            <a:r>
+              <a:rPr lang="en-US" sz="1450" b="1" dirty="0">
+                <a:solidFill>
+                  <a:srgbClr val="33302B"/>
+                </a:solidFill>
+                <a:latin typeface="Georgia" pitchFamily="34" charset="0"/>
+                <a:ea typeface="Georgia" pitchFamily="34" charset="-122"/>
+                <a:cs typeface="Georgia" pitchFamily="34" charset="-120"/>
+              </a:rPr>
+              <a:t>Name the crossing.   </a:t>
+            </a:r>
+            <a:pPr indent="0" marL="0">
+              <a:lnSpc>
+                <a:spcPct val="112000"/>
+              </a:lnSpc>
+              <a:buNone/>
+            </a:pPr>
+            <a:r>
+              <a:rPr lang="en-US" sz="1250" dirty="0">
+                <a:solidFill>
+                  <a:srgbClr val="6E6A62"/>
+                </a:solidFill>
+                <a:latin typeface="Georgia" pitchFamily="34" charset="0"/>
+                <a:ea typeface="Georgia" pitchFamily="34" charset="-122"/>
+                <a:cs typeface="Georgia" pitchFamily="34" charset="-120"/>
+              </a:rPr>
+              <a:t>Every missing property has a boundary where it should have been carried and wasn’t.</a:t>
+            </a:r>
+            <a:endParaRPr lang="en-US" sz="1450" dirty="0"/>
+          </a:p>
+        </p:txBody>
+      </p:sp>
+      <p:sp>
+        <p:nvSpPr>
+          <p:cNvPr id="10" name="Shape 8"/>
+          <p:cNvSpPr/>
+          <p:nvPr/>
+        </p:nvSpPr>
+        <p:spPr>
+          <a:xfrm>
+            <a:off x="566928" y="4800600"/>
+            <a:ext cx="457200" cy="457200"/>
+          </a:xfrm>
+          <a:prstGeom prst="ellipse">
+            <a:avLst/>
+          </a:prstGeom>
+          <a:solidFill>
+            <a:srgbClr val="8A8378"/>
+          </a:solidFill>
+          <a:ln/>
+        </p:spPr>
+      </p:sp>
+      <p:sp>
+        <p:nvSpPr>
+          <p:cNvPr id="11" name="Text 9"/>
+          <p:cNvSpPr/>
+          <p:nvPr/>
+        </p:nvSpPr>
+        <p:spPr>
+          <a:xfrm>
+            <a:off x="566928" y="4800600"/>
+            <a:ext cx="457200" cy="457200"/>
+          </a:xfrm>
+          <a:prstGeom prst="rect">
+            <a:avLst/>
+          </a:prstGeom>
+          <a:noFill/>
+          <a:ln/>
+        </p:spPr>
+        <p:txBody>
+          <a:bodyPr wrap="square" rtlCol="0" anchor="ctr"/>
+          <a:lstStyle/>
+          <a:p>
+            <a:pPr algn="ctr" indent="0" marL="0">
+              <a:buNone/>
+            </a:pPr>
+            <a:r>
+              <a:rPr lang="en-US" sz="1400" b="1" dirty="0">
+                <a:solidFill>
+                  <a:srgbClr val="FFFFFF"/>
+                </a:solidFill>
+                <a:latin typeface="Georgia" pitchFamily="34" charset="0"/>
+                <a:ea typeface="Georgia" pitchFamily="34" charset="-122"/>
+                <a:cs typeface="Georgia" pitchFamily="34" charset="-120"/>
+              </a:rPr>
+              <a:t>3</a:t>
+            </a:r>
+            <a:endParaRPr lang="en-US" sz="1400" dirty="0"/>
+          </a:p>
+        </p:txBody>
+      </p:sp>
+      <p:sp>
+        <p:nvSpPr>
+          <p:cNvPr id="12" name="Text 10"/>
+          <p:cNvSpPr/>
+          <p:nvPr/>
+        </p:nvSpPr>
+        <p:spPr>
+          <a:xfrm>
+            <a:off x="1234440" y="4745736"/>
+            <a:ext cx="10280599" cy="1444752"/>
+          </a:xfrm>
+          <a:prstGeom prst="rect">
+            <a:avLst/>
+          </a:prstGeom>
+          <a:noFill/>
+          <a:ln/>
+        </p:spPr>
+        <p:txBody>
+          <a:bodyPr wrap="square" rtlCol="0" anchor="t"/>
+          <a:lstStyle/>
+          <a:p>
+            <a:pPr indent="0" marL="0">
+              <a:lnSpc>
+                <a:spcPct val="112000"/>
+              </a:lnSpc>
+              <a:buNone/>
+            </a:pPr>
+            <a:r>
+              <a:rPr lang="en-US" sz="1450" b="1" dirty="0">
+                <a:solidFill>
+                  <a:srgbClr val="33302B"/>
+                </a:solidFill>
+                <a:latin typeface="Georgia" pitchFamily="34" charset="0"/>
+                <a:ea typeface="Georgia" pitchFamily="34" charset="-122"/>
+                <a:cs typeface="Georgia" pitchFamily="34" charset="-120"/>
+              </a:rPr>
+              <a:t>Resist ‘it was human error’.   </a:t>
+            </a:r>
+            <a:pPr indent="0" marL="0">
+              <a:lnSpc>
+                <a:spcPct val="112000"/>
+              </a:lnSpc>
+              <a:buNone/>
+            </a:pPr>
+            <a:r>
+              <a:rPr lang="en-US" sz="1250" dirty="0">
+                <a:solidFill>
+                  <a:srgbClr val="6E6A62"/>
+                </a:solidFill>
+                <a:latin typeface="Georgia" pitchFamily="34" charset="0"/>
+                <a:ea typeface="Georgia" pitchFamily="34" charset="-122"/>
+                <a:cs typeface="Georgia" pitchFamily="34" charset="-120"/>
+              </a:rPr>
+              <a:t>That verdict hides the crossing that manufactured the error.</a:t>
+            </a:r>
+            <a:endParaRPr lang="en-US" sz="1450" dirty="0"/>
+          </a:p>
+        </p:txBody>
+      </p:sp>
+      <p:sp>
+        <p:nvSpPr>
+          <p:cNvPr id="13" name="Text 11"/>
+          <p:cNvSpPr/>
+          <p:nvPr/>
+        </p:nvSpPr>
+        <p:spPr>
+          <a:xfrm>
+            <a:off x="566928" y="6473952"/>
+            <a:ext cx="9960559" cy="274320"/>
+          </a:xfrm>
+          <a:prstGeom prst="rect">
+            <a:avLst/>
+          </a:prstGeom>
+          <a:noFill/>
+          <a:ln/>
+        </p:spPr>
+        <p:txBody>
+          <a:bodyPr wrap="square" rtlCol="0" anchor="ctr"/>
+          <a:lstStyle/>
+          <a:p>
+            <a:pPr algn="l" indent="0" marL="0">
+              <a:buNone/>
+            </a:pPr>
+            <a:r>
+              <a:rPr lang="en-US" sz="900" i="1" dirty="0">
+                <a:solidFill>
+                  <a:srgbClr val="6E6A62"/>
+                </a:solidFill>
+                <a:latin typeface="Georgia" pitchFamily="34" charset="0"/>
+                <a:ea typeface="Georgia" pitchFamily="34" charset="-122"/>
+                <a:cs typeface="Georgia" pitchFamily="34" charset="-120"/>
+              </a:rPr>
+              <a:t>What the Structure Does Not Carry</a:t>
+            </a:r>
+            <a:pPr algn="l" indent="0" marL="0">
+              <a:buNone/>
+            </a:pPr>
+            <a:r>
+              <a:rPr lang="en-US" sz="900" dirty="0">
+                <a:solidFill>
+                  <a:srgbClr val="6E6A62"/>
+                </a:solidFill>
+                <a:latin typeface="Georgia" pitchFamily="34" charset="0"/>
+                <a:ea typeface="Georgia" pitchFamily="34" charset="-122"/>
+                <a:cs typeface="Georgia" pitchFamily="34" charset="-120"/>
+              </a:rPr>
+              <a:t>  ·  Professional Certificate — The Custody Architect</a:t>
+            </a:r>
+            <a:endParaRPr lang="en-US" sz="900" dirty="0"/>
+          </a:p>
+        </p:txBody>
+      </p:sp>
+      <p:sp>
+        <p:nvSpPr>
+          <p:cNvPr id="14" name="Text 12"/>
+          <p:cNvSpPr/>
+          <p:nvPr/>
+        </p:nvSpPr>
+        <p:spPr>
+          <a:xfrm>
+            <a:off x="10710367" y="6473952"/>
+            <a:ext cx="914400" cy="274320"/>
+          </a:xfrm>
+          <a:prstGeom prst="rect">
+            <a:avLst/>
+          </a:prstGeom>
+          <a:noFill/>
+          <a:ln/>
+        </p:spPr>
+        <p:txBody>
+          <a:bodyPr wrap="square" rtlCol="0" anchor="ctr"/>
+          <a:lstStyle/>
+          <a:p>
+            <a:pPr algn="r" indent="0" marL="0">
+              <a:buNone/>
+            </a:pPr>
+            <a:r>
+              <a:rPr lang="en-US" sz="900" dirty="0">
+                <a:solidFill>
+                  <a:srgbClr val="6E6A62"/>
+                </a:solidFill>
+                <a:latin typeface="Georgia" pitchFamily="34" charset="0"/>
+                <a:ea typeface="Georgia" pitchFamily="34" charset="-122"/>
+                <a:cs typeface="Georgia" pitchFamily="34" charset="-120"/>
+              </a:rPr>
+              <a:t>10</a:t>
+            </a:r>
+            <a:endParaRPr lang="en-US" sz="900" dirty="0"/>
+          </a:p>
+        </p:txBody>
+      </p:sp>
+    </p:spTree>
+  </p:cSld>
+  <p:clrMapOvr>
+    <a:masterClrMapping/>
+  </p:clrMapOvr>
+</p:sld>
+</file>
+
+<file path=ppt/slides/slide11.xml><?xml version="1.0" encoding="utf-8"?>
+<p:sld xmlns:a="http://schemas.openxmlformats.org/drawingml/2006/main" xmlns:r="http://schemas.openxmlformats.org/officeDocument/2006/relationships" xmlns:p="http://schemas.openxmlformats.org/presentationml/2006/main">
   <p:cSld name="Slide 10">
     <p:bg>
       <p:bgPr>
@@ -4364,7 +4921,7 @@
                 <a:ea typeface="Georgia" pitchFamily="34" charset="-122"/>
                 <a:cs typeface="Georgia" pitchFamily="34" charset="-120"/>
               </a:rPr>
-              <a:t>10</a:t>
+              <a:t>11</a:t>
             </a:r>
             <a:endParaRPr lang="en-US" sz="900" dirty="0"/>
           </a:p>
@@ -4378,7 +4935,7 @@
 </p:sld>
 </file>
 
-<file path=ppt/slides/slide11.xml><?xml version="1.0" encoding="utf-8"?>
+<file path=ppt/slides/slide12.xml><?xml version="1.0" encoding="utf-8"?>
 <p:sld xmlns:a="http://schemas.openxmlformats.org/drawingml/2006/main" xmlns:r="http://schemas.openxmlformats.org/officeDocument/2006/relationships" xmlns:p="http://schemas.openxmlformats.org/presentationml/2006/main">
   <p:cSld name="Slide 11">
     <p:bg>
@@ -4870,7 +5427,7 @@
                 <a:ea typeface="Georgia" pitchFamily="34" charset="-122"/>
                 <a:cs typeface="Georgia" pitchFamily="34" charset="-120"/>
               </a:rPr>
-              <a:t>11</a:t>
+              <a:t>12</a:t>
             </a:r>
             <a:endParaRPr lang="en-US" sz="900" dirty="0"/>
           </a:p>
@@ -4884,7 +5441,7 @@
 </p:sld>
 </file>
 
-<file path=ppt/slides/slide12.xml><?xml version="1.0" encoding="utf-8"?>
+<file path=ppt/slides/slide13.xml><?xml version="1.0" encoding="utf-8"?>
 <p:sld xmlns:a="http://schemas.openxmlformats.org/drawingml/2006/main" xmlns:r="http://schemas.openxmlformats.org/officeDocument/2006/relationships" xmlns:p="http://schemas.openxmlformats.org/presentationml/2006/main">
   <p:cSld name="Slide 12">
     <p:bg>
@@ -5748,7 +6305,7 @@
                 <a:ea typeface="Georgia" pitchFamily="34" charset="-122"/>
                 <a:cs typeface="Georgia" pitchFamily="34" charset="-120"/>
               </a:rPr>
-              <a:t>12</a:t>
+              <a:t>13</a:t>
             </a:r>
             <a:endParaRPr lang="en-US" sz="900" dirty="0"/>
           </a:p>
@@ -5762,7 +6319,7 @@
 </p:sld>
 </file>
 
-<file path=ppt/slides/slide13.xml><?xml version="1.0" encoding="utf-8"?>
+<file path=ppt/slides/slide14.xml><?xml version="1.0" encoding="utf-8"?>
 <p:sld xmlns:a="http://schemas.openxmlformats.org/drawingml/2006/main" xmlns:r="http://schemas.openxmlformats.org/officeDocument/2006/relationships" xmlns:p="http://schemas.openxmlformats.org/presentationml/2006/main">
   <p:cSld name="Slide 13">
     <p:bg>
@@ -6031,7 +6588,7 @@
                 <a:ea typeface="Georgia" pitchFamily="34" charset="-122"/>
                 <a:cs typeface="Georgia" pitchFamily="34" charset="-120"/>
               </a:rPr>
-              <a:t>13</a:t>
+              <a:t>14</a:t>
             </a:r>
             <a:endParaRPr lang="en-US" sz="900" dirty="0"/>
           </a:p>
@@ -6045,7 +6602,7 @@
 </p:sld>
 </file>
 
-<file path=ppt/slides/slide14.xml><?xml version="1.0" encoding="utf-8"?>
+<file path=ppt/slides/slide15.xml><?xml version="1.0" encoding="utf-8"?>
 <p:sld xmlns:a="http://schemas.openxmlformats.org/drawingml/2006/main" xmlns:r="http://schemas.openxmlformats.org/officeDocument/2006/relationships" xmlns:p="http://schemas.openxmlformats.org/presentationml/2006/main">
   <p:cSld name="Slide 14">
     <p:bg>
@@ -6558,7 +7115,7 @@
                 <a:ea typeface="Georgia" pitchFamily="34" charset="-122"/>
                 <a:cs typeface="Georgia" pitchFamily="34" charset="-120"/>
               </a:rPr>
-              <a:t>14</a:t>
+              <a:t>15</a:t>
             </a:r>
             <a:endParaRPr lang="en-US" sz="900" dirty="0"/>
           </a:p>
@@ -6572,7 +7129,7 @@
 </p:sld>
 </file>
 
-<file path=ppt/slides/slide15.xml><?xml version="1.0" encoding="utf-8"?>
+<file path=ppt/slides/slide16.xml><?xml version="1.0" encoding="utf-8"?>
 <p:sld xmlns:a="http://schemas.openxmlformats.org/drawingml/2006/main" xmlns:r="http://schemas.openxmlformats.org/officeDocument/2006/relationships" xmlns:p="http://schemas.openxmlformats.org/presentationml/2006/main">
   <p:cSld name="Slide 15">
     <p:bg>
@@ -6824,7 +7381,7 @@
                 <a:ea typeface="Georgia" pitchFamily="34" charset="-122"/>
                 <a:cs typeface="Georgia" pitchFamily="34" charset="-120"/>
               </a:rPr>
-              <a:t>15</a:t>
+              <a:t>16</a:t>
             </a:r>
             <a:endParaRPr lang="en-US" sz="900" dirty="0"/>
           </a:p>
@@ -6838,7 +7395,7 @@
 </p:sld>
 </file>
 
-<file path=ppt/slides/slide16.xml><?xml version="1.0" encoding="utf-8"?>
+<file path=ppt/slides/slide17.xml><?xml version="1.0" encoding="utf-8"?>
 <p:sld xmlns:a="http://schemas.openxmlformats.org/drawingml/2006/main" xmlns:r="http://schemas.openxmlformats.org/officeDocument/2006/relationships" xmlns:p="http://schemas.openxmlformats.org/presentationml/2006/main">
   <p:cSld name="Slide 16">
     <p:bg>
@@ -7330,7 +7887,7 @@
                 <a:ea typeface="Georgia" pitchFamily="34" charset="-122"/>
                 <a:cs typeface="Georgia" pitchFamily="34" charset="-120"/>
               </a:rPr>
-              <a:t>16</a:t>
+              <a:t>17</a:t>
             </a:r>
             <a:endParaRPr lang="en-US" sz="900" dirty="0"/>
           </a:p>
@@ -7344,7 +7901,7 @@
 </p:sld>
 </file>
 
-<file path=ppt/slides/slide17.xml><?xml version="1.0" encoding="utf-8"?>
+<file path=ppt/slides/slide18.xml><?xml version="1.0" encoding="utf-8"?>
 <p:sld xmlns:a="http://schemas.openxmlformats.org/drawingml/2006/main" xmlns:r="http://schemas.openxmlformats.org/officeDocument/2006/relationships" xmlns:p="http://schemas.openxmlformats.org/presentationml/2006/main">
   <p:cSld name="Slide 17">
     <p:bg>
@@ -8208,7 +8765,7 @@
                 <a:ea typeface="Georgia" pitchFamily="34" charset="-122"/>
                 <a:cs typeface="Georgia" pitchFamily="34" charset="-120"/>
               </a:rPr>
-              <a:t>17</a:t>
+              <a:t>18</a:t>
             </a:r>
             <a:endParaRPr lang="en-US" sz="900" dirty="0"/>
           </a:p>
@@ -8222,7 +8779,7 @@
 </p:sld>
 </file>
 
-<file path=ppt/slides/slide18.xml><?xml version="1.0" encoding="utf-8"?>
+<file path=ppt/slides/slide19.xml><?xml version="1.0" encoding="utf-8"?>
 <p:sld xmlns:a="http://schemas.openxmlformats.org/drawingml/2006/main" xmlns:r="http://schemas.openxmlformats.org/officeDocument/2006/relationships" xmlns:p="http://schemas.openxmlformats.org/presentationml/2006/main">
   <p:cSld name="Slide 18">
     <p:bg>
@@ -8705,512 +9262,6 @@
       <p:sp>
         <p:nvSpPr>
           <p:cNvPr id="15" name="Text 13"/>
-          <p:cNvSpPr/>
-          <p:nvPr/>
-        </p:nvSpPr>
-        <p:spPr>
-          <a:xfrm>
-            <a:off x="10710367" y="6473952"/>
-            <a:ext cx="914400" cy="274320"/>
-          </a:xfrm>
-          <a:prstGeom prst="rect">
-            <a:avLst/>
-          </a:prstGeom>
-          <a:noFill/>
-          <a:ln/>
-        </p:spPr>
-        <p:txBody>
-          <a:bodyPr wrap="square" rtlCol="0" anchor="ctr"/>
-          <a:lstStyle/>
-          <a:p>
-            <a:pPr algn="r" indent="0" marL="0">
-              <a:buNone/>
-            </a:pPr>
-            <a:r>
-              <a:rPr lang="en-US" sz="900" dirty="0">
-                <a:solidFill>
-                  <a:srgbClr val="6E6A62"/>
-                </a:solidFill>
-                <a:latin typeface="Georgia" pitchFamily="34" charset="0"/>
-                <a:ea typeface="Georgia" pitchFamily="34" charset="-122"/>
-                <a:cs typeface="Georgia" pitchFamily="34" charset="-120"/>
-              </a:rPr>
-              <a:t>18</a:t>
-            </a:r>
-            <a:endParaRPr lang="en-US" sz="900" dirty="0"/>
-          </a:p>
-        </p:txBody>
-      </p:sp>
-    </p:spTree>
-  </p:cSld>
-  <p:clrMapOvr>
-    <a:masterClrMapping/>
-  </p:clrMapOvr>
-</p:sld>
-</file>
-
-<file path=ppt/slides/slide19.xml><?xml version="1.0" encoding="utf-8"?>
-<p:sld xmlns:a="http://schemas.openxmlformats.org/drawingml/2006/main" xmlns:r="http://schemas.openxmlformats.org/officeDocument/2006/relationships" xmlns:p="http://schemas.openxmlformats.org/presentationml/2006/main">
-  <p:cSld name="Slide 19">
-    <p:bg>
-      <p:bgPr>
-        <a:solidFill>
-          <a:srgbClr val="F4F2EE"/>
-        </a:solidFill>
-      </p:bgPr>
-    </p:bg>
-    <p:spTree>
-      <p:nvGrpSpPr>
-        <p:cNvPr id="1" name=""/>
-        <p:cNvGrpSpPr/>
-        <p:nvPr/>
-      </p:nvGrpSpPr>
-      <p:grpSpPr>
-        <a:xfrm>
-          <a:off x="0" y="0"/>
-          <a:ext cx="0" cy="0"/>
-          <a:chOff x="0" y="0"/>
-          <a:chExt cx="0" cy="0"/>
-        </a:xfrm>
-      </p:grpSpPr>
-      <p:sp>
-        <p:nvSpPr>
-          <p:cNvPr id="2" name="Shape 0"/>
-          <p:cNvSpPr/>
-          <p:nvPr/>
-        </p:nvSpPr>
-        <p:spPr>
-          <a:xfrm>
-            <a:off x="0" y="0"/>
-            <a:ext cx="12191695" cy="1783080"/>
-          </a:xfrm>
-          <a:prstGeom prst="rect">
-            <a:avLst/>
-          </a:prstGeom>
-          <a:solidFill>
-            <a:srgbClr val="1B1A18"/>
-          </a:solidFill>
-          <a:ln/>
-        </p:spPr>
-      </p:sp>
-      <p:sp>
-        <p:nvSpPr>
-          <p:cNvPr id="3" name="Shape 1"/>
-          <p:cNvSpPr/>
-          <p:nvPr/>
-        </p:nvSpPr>
-        <p:spPr>
-          <a:xfrm>
-            <a:off x="566928" y="457200"/>
-            <a:ext cx="868680" cy="868680"/>
-          </a:xfrm>
-          <a:prstGeom prst="ellipse">
-            <a:avLst/>
-          </a:prstGeom>
-          <a:solidFill>
-            <a:srgbClr val="8A8378"/>
-          </a:solidFill>
-          <a:ln/>
-        </p:spPr>
-      </p:sp>
-      <p:sp>
-        <p:nvSpPr>
-          <p:cNvPr id="4" name="Text 2"/>
-          <p:cNvSpPr/>
-          <p:nvPr/>
-        </p:nvSpPr>
-        <p:spPr>
-          <a:xfrm>
-            <a:off x="566928" y="457200"/>
-            <a:ext cx="868680" cy="868680"/>
-          </a:xfrm>
-          <a:prstGeom prst="rect">
-            <a:avLst/>
-          </a:prstGeom>
-          <a:noFill/>
-          <a:ln/>
-        </p:spPr>
-        <p:txBody>
-          <a:bodyPr wrap="square" rtlCol="0" anchor="ctr"/>
-          <a:lstStyle/>
-          <a:p>
-            <a:pPr algn="ctr" indent="0" marL="0">
-              <a:lnSpc>
-                <a:spcPct val="90000"/>
-              </a:lnSpc>
-              <a:buNone/>
-            </a:pPr>
-            <a:r>
-              <a:rPr lang="en-US" sz="1400" b="1" dirty="0">
-                <a:solidFill>
-                  <a:srgbClr val="1B1A18"/>
-                </a:solidFill>
-                <a:latin typeface="Georgia" pitchFamily="34" charset="0"/>
-                <a:ea typeface="Georgia" pitchFamily="34" charset="-122"/>
-                <a:cs typeface="Georgia" pitchFamily="34" charset="-120"/>
-              </a:rPr>
-              <a:t>WK</a:t>
-            </a:r>
-            <a:endParaRPr lang="en-US" sz="1400" dirty="0"/>
-          </a:p>
-          <a:p>
-            <a:pPr algn="ctr" indent="0" marL="0">
-              <a:lnSpc>
-                <a:spcPct val="90000"/>
-              </a:lnSpc>
-              <a:buNone/>
-            </a:pPr>
-            <a:r>
-              <a:rPr lang="en-US" sz="1400" b="1" dirty="0">
-                <a:solidFill>
-                  <a:srgbClr val="1B1A18"/>
-                </a:solidFill>
-                <a:latin typeface="Georgia" pitchFamily="34" charset="0"/>
-                <a:ea typeface="Georgia" pitchFamily="34" charset="-122"/>
-                <a:cs typeface="Georgia" pitchFamily="34" charset="-120"/>
-              </a:rPr>
-              <a:t>5</a:t>
-            </a:r>
-            <a:endParaRPr lang="en-US" sz="1400" dirty="0"/>
-          </a:p>
-        </p:txBody>
-      </p:sp>
-      <p:sp>
-        <p:nvSpPr>
-          <p:cNvPr id="5" name="Text 3"/>
-          <p:cNvSpPr/>
-          <p:nvPr/>
-        </p:nvSpPr>
-        <p:spPr>
-          <a:xfrm>
-            <a:off x="1600200" y="457200"/>
-            <a:ext cx="10058400" cy="868680"/>
-          </a:xfrm>
-          <a:prstGeom prst="rect">
-            <a:avLst/>
-          </a:prstGeom>
-          <a:noFill/>
-          <a:ln/>
-        </p:spPr>
-        <p:txBody>
-          <a:bodyPr wrap="square" rtlCol="0" anchor="ctr"/>
-          <a:lstStyle/>
-          <a:p>
-            <a:pPr indent="0" marL="0">
-              <a:buNone/>
-            </a:pPr>
-            <a:r>
-              <a:rPr lang="en-US" sz="2250" b="1" dirty="0">
-                <a:solidFill>
-                  <a:srgbClr val="FFFFFF"/>
-                </a:solidFill>
-                <a:latin typeface="Georgia" pitchFamily="34" charset="0"/>
-                <a:ea typeface="Georgia" pitchFamily="34" charset="-122"/>
-                <a:cs typeface="Georgia" pitchFamily="34" charset="-120"/>
-              </a:rPr>
-              <a:t>Context and memory custody in practice</a:t>
-            </a:r>
-            <a:endParaRPr lang="en-US" sz="2250" dirty="0"/>
-          </a:p>
-        </p:txBody>
-      </p:sp>
-      <p:sp>
-        <p:nvSpPr>
-          <p:cNvPr id="6" name="Text 4"/>
-          <p:cNvSpPr/>
-          <p:nvPr/>
-        </p:nvSpPr>
-        <p:spPr>
-          <a:xfrm>
-            <a:off x="566928" y="2103120"/>
-            <a:ext cx="4572000" cy="320040"/>
-          </a:xfrm>
-          <a:prstGeom prst="rect">
-            <a:avLst/>
-          </a:prstGeom>
-          <a:noFill/>
-          <a:ln/>
-        </p:spPr>
-        <p:txBody>
-          <a:bodyPr wrap="square" rtlCol="0" anchor="ctr"/>
-          <a:lstStyle/>
-          <a:p>
-            <a:pPr indent="0" marL="0">
-              <a:buNone/>
-            </a:pPr>
-            <a:r>
-              <a:rPr lang="en-US" sz="1050" b="1" spc="100" kern="0" dirty="0">
-                <a:solidFill>
-                  <a:srgbClr val="8A8378"/>
-                </a:solidFill>
-                <a:latin typeface="Georgia" pitchFamily="34" charset="0"/>
-                <a:ea typeface="Georgia" pitchFamily="34" charset="-122"/>
-                <a:cs typeface="Georgia" pitchFamily="34" charset="-120"/>
-              </a:rPr>
-              <a:t>THIS WEEK</a:t>
-            </a:r>
-            <a:endParaRPr lang="en-US" sz="1150" dirty="0"/>
-          </a:p>
-        </p:txBody>
-      </p:sp>
-      <p:sp>
-        <p:nvSpPr>
-          <p:cNvPr id="7" name="Text 5"/>
-          <p:cNvSpPr/>
-          <p:nvPr/>
-        </p:nvSpPr>
-        <p:spPr>
-          <a:xfrm>
-            <a:off x="566928" y="2468880"/>
-            <a:ext cx="6492240" cy="3291840"/>
-          </a:xfrm>
-          <a:prstGeom prst="rect">
-            <a:avLst/>
-          </a:prstGeom>
-          <a:noFill/>
-          <a:ln/>
-        </p:spPr>
-        <p:txBody>
-          <a:bodyPr wrap="square" rtlCol="0" anchor="t"/>
-          <a:lstStyle/>
-          <a:p>
-            <a:pPr indent="0" marL="0">
-              <a:lnSpc>
-                <a:spcPct val="130000"/>
-              </a:lnSpc>
-              <a:buNone/>
-            </a:pPr>
-            <a:r>
-              <a:rPr lang="en-US" sz="1400" dirty="0">
-                <a:solidFill>
-                  <a:srgbClr val="33302B"/>
-                </a:solidFill>
-                <a:latin typeface="Georgia" pitchFamily="34" charset="0"/>
-                <a:ea typeface="Georgia" pitchFamily="34" charset="-122"/>
-                <a:cs typeface="Georgia" pitchFamily="34" charset="-120"/>
-              </a:rPr>
-              <a:t>The properties that leak most quietly are context and memory. This week: why no schema carries ‘why’, how to price the reconstruction tax you are already paying, and how to design durable memory with the ceremony and provenance that make it trustworthy — and attack-resistant.</a:t>
-            </a:r>
-            <a:endParaRPr lang="en-US" sz="1400" dirty="0"/>
-          </a:p>
-        </p:txBody>
-      </p:sp>
-      <p:sp>
-        <p:nvSpPr>
-          <p:cNvPr id="8" name="Shape 6"/>
-          <p:cNvSpPr/>
-          <p:nvPr/>
-        </p:nvSpPr>
-        <p:spPr>
-          <a:xfrm>
-            <a:off x="7452360" y="2103120"/>
-            <a:ext cx="4172407" cy="3840480"/>
-          </a:xfrm>
-          <a:prstGeom prst="roundRect">
-            <a:avLst>
-              <a:gd name="adj" fmla="val 2381"/>
-            </a:avLst>
-          </a:prstGeom>
-          <a:solidFill>
-            <a:srgbClr val="FFFFFF"/>
-          </a:solidFill>
-          <a:ln w="12700">
-            <a:solidFill>
-              <a:srgbClr val="EBE7DF"/>
-            </a:solidFill>
-            <a:prstDash val="solid"/>
-          </a:ln>
-        </p:spPr>
-      </p:sp>
-      <p:sp>
-        <p:nvSpPr>
-          <p:cNvPr id="9" name="Text 7"/>
-          <p:cNvSpPr/>
-          <p:nvPr/>
-        </p:nvSpPr>
-        <p:spPr>
-          <a:xfrm>
-            <a:off x="7680960" y="2286000"/>
-            <a:ext cx="3840480" cy="365760"/>
-          </a:xfrm>
-          <a:prstGeom prst="rect">
-            <a:avLst/>
-          </a:prstGeom>
-          <a:noFill/>
-          <a:ln/>
-        </p:spPr>
-        <p:txBody>
-          <a:bodyPr wrap="square" rtlCol="0" anchor="ctr"/>
-          <a:lstStyle/>
-          <a:p>
-            <a:pPr indent="0" marL="0">
-              <a:buNone/>
-            </a:pPr>
-            <a:r>
-              <a:rPr lang="en-US" sz="1300" b="1" dirty="0">
-                <a:solidFill>
-                  <a:srgbClr val="1B1A18"/>
-                </a:solidFill>
-                <a:latin typeface="Georgia" pitchFamily="34" charset="0"/>
-                <a:ea typeface="Georgia" pitchFamily="34" charset="-122"/>
-                <a:cs typeface="Georgia" pitchFamily="34" charset="-120"/>
-              </a:rPr>
-              <a:t>You will be able to…</a:t>
-            </a:r>
-            <a:endParaRPr lang="en-US" sz="1300" dirty="0"/>
-          </a:p>
-        </p:txBody>
-      </p:sp>
-      <p:sp>
-        <p:nvSpPr>
-          <p:cNvPr id="10" name="Text 8"/>
-          <p:cNvSpPr/>
-          <p:nvPr/>
-        </p:nvSpPr>
-        <p:spPr>
-          <a:xfrm>
-            <a:off x="7680960" y="2697480"/>
-            <a:ext cx="3703320" cy="3108960"/>
-          </a:xfrm>
-          <a:prstGeom prst="rect">
-            <a:avLst/>
-          </a:prstGeom>
-          <a:noFill/>
-          <a:ln/>
-        </p:spPr>
-        <p:txBody>
-          <a:bodyPr wrap="square" rtlCol="0" anchor="t"/>
-          <a:lstStyle/>
-          <a:p>
-            <a:pPr marL="177800" indent="-177800">
-              <a:lnSpc>
-                <a:spcPct val="110000"/>
-              </a:lnSpc>
-              <a:spcAft>
-                <a:spcPts val="800"/>
-              </a:spcAft>
-              <a:buSzPct val="100000"/>
-              <a:buChar char="•"/>
-            </a:pPr>
-            <a:r>
-              <a:rPr lang="en-US" sz="1150" dirty="0">
-                <a:solidFill>
-                  <a:srgbClr val="33302B"/>
-                </a:solidFill>
-                <a:latin typeface="Georgia" pitchFamily="34" charset="0"/>
-                <a:ea typeface="Georgia" pitchFamily="34" charset="-122"/>
-                <a:cs typeface="Georgia" pitchFamily="34" charset="-120"/>
-              </a:rPr>
-              <a:t>Spot and price the reconstruction tax</a:t>
-            </a:r>
-            <a:endParaRPr lang="en-US" sz="1150" dirty="0"/>
-          </a:p>
-          <a:p>
-            <a:pPr marL="177800" indent="-177800">
-              <a:lnSpc>
-                <a:spcPct val="110000"/>
-              </a:lnSpc>
-              <a:spcAft>
-                <a:spcPts val="800"/>
-              </a:spcAft>
-              <a:buSzPct val="100000"/>
-              <a:buChar char="•"/>
-            </a:pPr>
-            <a:r>
-              <a:rPr lang="en-US" sz="1150" dirty="0">
-                <a:solidFill>
-                  <a:srgbClr val="33302B"/>
-                </a:solidFill>
-                <a:latin typeface="Georgia" pitchFamily="34" charset="0"/>
-                <a:ea typeface="Georgia" pitchFamily="34" charset="-122"/>
-                <a:cs typeface="Georgia" pitchFamily="34" charset="-120"/>
-              </a:rPr>
-              <a:t>Choose the right store for a knowledge shape</a:t>
-            </a:r>
-            <a:endParaRPr lang="en-US" sz="1150" dirty="0"/>
-          </a:p>
-          <a:p>
-            <a:pPr marL="177800" indent="-177800">
-              <a:lnSpc>
-                <a:spcPct val="110000"/>
-              </a:lnSpc>
-              <a:spcAft>
-                <a:spcPts val="800"/>
-              </a:spcAft>
-              <a:buSzPct val="100000"/>
-              <a:buChar char="•"/>
-            </a:pPr>
-            <a:r>
-              <a:rPr lang="en-US" sz="1150" dirty="0">
-                <a:solidFill>
-                  <a:srgbClr val="33302B"/>
-                </a:solidFill>
-                <a:latin typeface="Georgia" pitchFamily="34" charset="0"/>
-                <a:ea typeface="Georgia" pitchFamily="34" charset="-122"/>
-                <a:cs typeface="Georgia" pitchFamily="34" charset="-120"/>
-              </a:rPr>
-              <a:t>Design a write-ceremony with provenance</a:t>
-            </a:r>
-            <a:endParaRPr lang="en-US" sz="1150" dirty="0"/>
-          </a:p>
-        </p:txBody>
-      </p:sp>
-      <p:sp>
-        <p:nvSpPr>
-          <p:cNvPr id="11" name="Text 9"/>
-          <p:cNvSpPr/>
-          <p:nvPr/>
-        </p:nvSpPr>
-        <p:spPr>
-          <a:xfrm>
-            <a:off x="566928" y="6473952"/>
-            <a:ext cx="9960559" cy="274320"/>
-          </a:xfrm>
-          <a:prstGeom prst="rect">
-            <a:avLst/>
-          </a:prstGeom>
-          <a:noFill/>
-          <a:ln/>
-        </p:spPr>
-        <p:txBody>
-          <a:bodyPr wrap="square" rtlCol="0" anchor="ctr"/>
-          <a:lstStyle/>
-          <a:p>
-            <a:pPr algn="l" indent="0" marL="0">
-              <a:buNone/>
-            </a:pPr>
-            <a:r>
-              <a:rPr lang="en-US" sz="900" i="1" dirty="0">
-                <a:solidFill>
-                  <a:srgbClr val="6E6A62"/>
-                </a:solidFill>
-                <a:latin typeface="Georgia" pitchFamily="34" charset="0"/>
-                <a:ea typeface="Georgia" pitchFamily="34" charset="-122"/>
-                <a:cs typeface="Georgia" pitchFamily="34" charset="-120"/>
-              </a:rPr>
-              <a:t>What the Structure Does Not Carry</a:t>
-            </a:r>
-            <a:pPr algn="l" indent="0" marL="0">
-              <a:buNone/>
-            </a:pPr>
-            <a:r>
-              <a:rPr lang="en-US" sz="900" dirty="0">
-                <a:solidFill>
-                  <a:srgbClr val="6E6A62"/>
-                </a:solidFill>
-                <a:latin typeface="Georgia" pitchFamily="34" charset="0"/>
-                <a:ea typeface="Georgia" pitchFamily="34" charset="-122"/>
-                <a:cs typeface="Georgia" pitchFamily="34" charset="-120"/>
-              </a:rPr>
-              <a:t>  ·  Professional Certificate — The Custody Architect</a:t>
-            </a:r>
-            <a:endParaRPr lang="en-US" sz="900" dirty="0"/>
-          </a:p>
-        </p:txBody>
-      </p:sp>
-      <p:sp>
-        <p:nvSpPr>
-          <p:cNvPr id="12" name="Text 10"/>
           <p:cNvSpPr/>
           <p:nvPr/>
         </p:nvSpPr>
@@ -9523,6 +9574,512 @@
 
 <file path=ppt/slides/slide20.xml><?xml version="1.0" encoding="utf-8"?>
 <p:sld xmlns:a="http://schemas.openxmlformats.org/drawingml/2006/main" xmlns:r="http://schemas.openxmlformats.org/officeDocument/2006/relationships" xmlns:p="http://schemas.openxmlformats.org/presentationml/2006/main">
+  <p:cSld name="Slide 19">
+    <p:bg>
+      <p:bgPr>
+        <a:solidFill>
+          <a:srgbClr val="F4F2EE"/>
+        </a:solidFill>
+      </p:bgPr>
+    </p:bg>
+    <p:spTree>
+      <p:nvGrpSpPr>
+        <p:cNvPr id="1" name=""/>
+        <p:cNvGrpSpPr/>
+        <p:nvPr/>
+      </p:nvGrpSpPr>
+      <p:grpSpPr>
+        <a:xfrm>
+          <a:off x="0" y="0"/>
+          <a:ext cx="0" cy="0"/>
+          <a:chOff x="0" y="0"/>
+          <a:chExt cx="0" cy="0"/>
+        </a:xfrm>
+      </p:grpSpPr>
+      <p:sp>
+        <p:nvSpPr>
+          <p:cNvPr id="2" name="Shape 0"/>
+          <p:cNvSpPr/>
+          <p:nvPr/>
+        </p:nvSpPr>
+        <p:spPr>
+          <a:xfrm>
+            <a:off x="0" y="0"/>
+            <a:ext cx="12191695" cy="1783080"/>
+          </a:xfrm>
+          <a:prstGeom prst="rect">
+            <a:avLst/>
+          </a:prstGeom>
+          <a:solidFill>
+            <a:srgbClr val="1B1A18"/>
+          </a:solidFill>
+          <a:ln/>
+        </p:spPr>
+      </p:sp>
+      <p:sp>
+        <p:nvSpPr>
+          <p:cNvPr id="3" name="Shape 1"/>
+          <p:cNvSpPr/>
+          <p:nvPr/>
+        </p:nvSpPr>
+        <p:spPr>
+          <a:xfrm>
+            <a:off x="566928" y="457200"/>
+            <a:ext cx="868680" cy="868680"/>
+          </a:xfrm>
+          <a:prstGeom prst="ellipse">
+            <a:avLst/>
+          </a:prstGeom>
+          <a:solidFill>
+            <a:srgbClr val="8A8378"/>
+          </a:solidFill>
+          <a:ln/>
+        </p:spPr>
+      </p:sp>
+      <p:sp>
+        <p:nvSpPr>
+          <p:cNvPr id="4" name="Text 2"/>
+          <p:cNvSpPr/>
+          <p:nvPr/>
+        </p:nvSpPr>
+        <p:spPr>
+          <a:xfrm>
+            <a:off x="566928" y="457200"/>
+            <a:ext cx="868680" cy="868680"/>
+          </a:xfrm>
+          <a:prstGeom prst="rect">
+            <a:avLst/>
+          </a:prstGeom>
+          <a:noFill/>
+          <a:ln/>
+        </p:spPr>
+        <p:txBody>
+          <a:bodyPr wrap="square" rtlCol="0" anchor="ctr"/>
+          <a:lstStyle/>
+          <a:p>
+            <a:pPr algn="ctr" indent="0" marL="0">
+              <a:lnSpc>
+                <a:spcPct val="90000"/>
+              </a:lnSpc>
+              <a:buNone/>
+            </a:pPr>
+            <a:r>
+              <a:rPr lang="en-US" sz="1400" b="1" dirty="0">
+                <a:solidFill>
+                  <a:srgbClr val="1B1A18"/>
+                </a:solidFill>
+                <a:latin typeface="Georgia" pitchFamily="34" charset="0"/>
+                <a:ea typeface="Georgia" pitchFamily="34" charset="-122"/>
+                <a:cs typeface="Georgia" pitchFamily="34" charset="-120"/>
+              </a:rPr>
+              <a:t>WK</a:t>
+            </a:r>
+            <a:endParaRPr lang="en-US" sz="1400" dirty="0"/>
+          </a:p>
+          <a:p>
+            <a:pPr algn="ctr" indent="0" marL="0">
+              <a:lnSpc>
+                <a:spcPct val="90000"/>
+              </a:lnSpc>
+              <a:buNone/>
+            </a:pPr>
+            <a:r>
+              <a:rPr lang="en-US" sz="1400" b="1" dirty="0">
+                <a:solidFill>
+                  <a:srgbClr val="1B1A18"/>
+                </a:solidFill>
+                <a:latin typeface="Georgia" pitchFamily="34" charset="0"/>
+                <a:ea typeface="Georgia" pitchFamily="34" charset="-122"/>
+                <a:cs typeface="Georgia" pitchFamily="34" charset="-120"/>
+              </a:rPr>
+              <a:t>5</a:t>
+            </a:r>
+            <a:endParaRPr lang="en-US" sz="1400" dirty="0"/>
+          </a:p>
+        </p:txBody>
+      </p:sp>
+      <p:sp>
+        <p:nvSpPr>
+          <p:cNvPr id="5" name="Text 3"/>
+          <p:cNvSpPr/>
+          <p:nvPr/>
+        </p:nvSpPr>
+        <p:spPr>
+          <a:xfrm>
+            <a:off x="1600200" y="457200"/>
+            <a:ext cx="10058400" cy="868680"/>
+          </a:xfrm>
+          <a:prstGeom prst="rect">
+            <a:avLst/>
+          </a:prstGeom>
+          <a:noFill/>
+          <a:ln/>
+        </p:spPr>
+        <p:txBody>
+          <a:bodyPr wrap="square" rtlCol="0" anchor="ctr"/>
+          <a:lstStyle/>
+          <a:p>
+            <a:pPr indent="0" marL="0">
+              <a:buNone/>
+            </a:pPr>
+            <a:r>
+              <a:rPr lang="en-US" sz="2250" b="1" dirty="0">
+                <a:solidFill>
+                  <a:srgbClr val="FFFFFF"/>
+                </a:solidFill>
+                <a:latin typeface="Georgia" pitchFamily="34" charset="0"/>
+                <a:ea typeface="Georgia" pitchFamily="34" charset="-122"/>
+                <a:cs typeface="Georgia" pitchFamily="34" charset="-120"/>
+              </a:rPr>
+              <a:t>Context and memory custody in practice</a:t>
+            </a:r>
+            <a:endParaRPr lang="en-US" sz="2250" dirty="0"/>
+          </a:p>
+        </p:txBody>
+      </p:sp>
+      <p:sp>
+        <p:nvSpPr>
+          <p:cNvPr id="6" name="Text 4"/>
+          <p:cNvSpPr/>
+          <p:nvPr/>
+        </p:nvSpPr>
+        <p:spPr>
+          <a:xfrm>
+            <a:off x="566928" y="2103120"/>
+            <a:ext cx="4572000" cy="320040"/>
+          </a:xfrm>
+          <a:prstGeom prst="rect">
+            <a:avLst/>
+          </a:prstGeom>
+          <a:noFill/>
+          <a:ln/>
+        </p:spPr>
+        <p:txBody>
+          <a:bodyPr wrap="square" rtlCol="0" anchor="ctr"/>
+          <a:lstStyle/>
+          <a:p>
+            <a:pPr indent="0" marL="0">
+              <a:buNone/>
+            </a:pPr>
+            <a:r>
+              <a:rPr lang="en-US" sz="1050" b="1" spc="100" kern="0" dirty="0">
+                <a:solidFill>
+                  <a:srgbClr val="8A8378"/>
+                </a:solidFill>
+                <a:latin typeface="Georgia" pitchFamily="34" charset="0"/>
+                <a:ea typeface="Georgia" pitchFamily="34" charset="-122"/>
+                <a:cs typeface="Georgia" pitchFamily="34" charset="-120"/>
+              </a:rPr>
+              <a:t>THIS WEEK</a:t>
+            </a:r>
+            <a:endParaRPr lang="en-US" sz="1150" dirty="0"/>
+          </a:p>
+        </p:txBody>
+      </p:sp>
+      <p:sp>
+        <p:nvSpPr>
+          <p:cNvPr id="7" name="Text 5"/>
+          <p:cNvSpPr/>
+          <p:nvPr/>
+        </p:nvSpPr>
+        <p:spPr>
+          <a:xfrm>
+            <a:off x="566928" y="2468880"/>
+            <a:ext cx="6492240" cy="3291840"/>
+          </a:xfrm>
+          <a:prstGeom prst="rect">
+            <a:avLst/>
+          </a:prstGeom>
+          <a:noFill/>
+          <a:ln/>
+        </p:spPr>
+        <p:txBody>
+          <a:bodyPr wrap="square" rtlCol="0" anchor="t"/>
+          <a:lstStyle/>
+          <a:p>
+            <a:pPr indent="0" marL="0">
+              <a:lnSpc>
+                <a:spcPct val="130000"/>
+              </a:lnSpc>
+              <a:buNone/>
+            </a:pPr>
+            <a:r>
+              <a:rPr lang="en-US" sz="1400" dirty="0">
+                <a:solidFill>
+                  <a:srgbClr val="33302B"/>
+                </a:solidFill>
+                <a:latin typeface="Georgia" pitchFamily="34" charset="0"/>
+                <a:ea typeface="Georgia" pitchFamily="34" charset="-122"/>
+                <a:cs typeface="Georgia" pitchFamily="34" charset="-120"/>
+              </a:rPr>
+              <a:t>The properties that leak most quietly are context and memory. This week: why no schema carries ‘why’, how to price the reconstruction tax you are already paying, and how to design durable memory with the ceremony and provenance that make it trustworthy — and attack-resistant.</a:t>
+            </a:r>
+            <a:endParaRPr lang="en-US" sz="1400" dirty="0"/>
+          </a:p>
+        </p:txBody>
+      </p:sp>
+      <p:sp>
+        <p:nvSpPr>
+          <p:cNvPr id="8" name="Shape 6"/>
+          <p:cNvSpPr/>
+          <p:nvPr/>
+        </p:nvSpPr>
+        <p:spPr>
+          <a:xfrm>
+            <a:off x="7452360" y="2103120"/>
+            <a:ext cx="4172407" cy="3840480"/>
+          </a:xfrm>
+          <a:prstGeom prst="roundRect">
+            <a:avLst>
+              <a:gd name="adj" fmla="val 2381"/>
+            </a:avLst>
+          </a:prstGeom>
+          <a:solidFill>
+            <a:srgbClr val="FFFFFF"/>
+          </a:solidFill>
+          <a:ln w="12700">
+            <a:solidFill>
+              <a:srgbClr val="EBE7DF"/>
+            </a:solidFill>
+            <a:prstDash val="solid"/>
+          </a:ln>
+        </p:spPr>
+      </p:sp>
+      <p:sp>
+        <p:nvSpPr>
+          <p:cNvPr id="9" name="Text 7"/>
+          <p:cNvSpPr/>
+          <p:nvPr/>
+        </p:nvSpPr>
+        <p:spPr>
+          <a:xfrm>
+            <a:off x="7680960" y="2286000"/>
+            <a:ext cx="3840480" cy="365760"/>
+          </a:xfrm>
+          <a:prstGeom prst="rect">
+            <a:avLst/>
+          </a:prstGeom>
+          <a:noFill/>
+          <a:ln/>
+        </p:spPr>
+        <p:txBody>
+          <a:bodyPr wrap="square" rtlCol="0" anchor="ctr"/>
+          <a:lstStyle/>
+          <a:p>
+            <a:pPr indent="0" marL="0">
+              <a:buNone/>
+            </a:pPr>
+            <a:r>
+              <a:rPr lang="en-US" sz="1300" b="1" dirty="0">
+                <a:solidFill>
+                  <a:srgbClr val="1B1A18"/>
+                </a:solidFill>
+                <a:latin typeface="Georgia" pitchFamily="34" charset="0"/>
+                <a:ea typeface="Georgia" pitchFamily="34" charset="-122"/>
+                <a:cs typeface="Georgia" pitchFamily="34" charset="-120"/>
+              </a:rPr>
+              <a:t>You will be able to…</a:t>
+            </a:r>
+            <a:endParaRPr lang="en-US" sz="1300" dirty="0"/>
+          </a:p>
+        </p:txBody>
+      </p:sp>
+      <p:sp>
+        <p:nvSpPr>
+          <p:cNvPr id="10" name="Text 8"/>
+          <p:cNvSpPr/>
+          <p:nvPr/>
+        </p:nvSpPr>
+        <p:spPr>
+          <a:xfrm>
+            <a:off x="7680960" y="2697480"/>
+            <a:ext cx="3703320" cy="3108960"/>
+          </a:xfrm>
+          <a:prstGeom prst="rect">
+            <a:avLst/>
+          </a:prstGeom>
+          <a:noFill/>
+          <a:ln/>
+        </p:spPr>
+        <p:txBody>
+          <a:bodyPr wrap="square" rtlCol="0" anchor="t"/>
+          <a:lstStyle/>
+          <a:p>
+            <a:pPr marL="177800" indent="-177800">
+              <a:lnSpc>
+                <a:spcPct val="110000"/>
+              </a:lnSpc>
+              <a:spcAft>
+                <a:spcPts val="800"/>
+              </a:spcAft>
+              <a:buSzPct val="100000"/>
+              <a:buChar char="•"/>
+            </a:pPr>
+            <a:r>
+              <a:rPr lang="en-US" sz="1150" dirty="0">
+                <a:solidFill>
+                  <a:srgbClr val="33302B"/>
+                </a:solidFill>
+                <a:latin typeface="Georgia" pitchFamily="34" charset="0"/>
+                <a:ea typeface="Georgia" pitchFamily="34" charset="-122"/>
+                <a:cs typeface="Georgia" pitchFamily="34" charset="-120"/>
+              </a:rPr>
+              <a:t>Spot and price the reconstruction tax</a:t>
+            </a:r>
+            <a:endParaRPr lang="en-US" sz="1150" dirty="0"/>
+          </a:p>
+          <a:p>
+            <a:pPr marL="177800" indent="-177800">
+              <a:lnSpc>
+                <a:spcPct val="110000"/>
+              </a:lnSpc>
+              <a:spcAft>
+                <a:spcPts val="800"/>
+              </a:spcAft>
+              <a:buSzPct val="100000"/>
+              <a:buChar char="•"/>
+            </a:pPr>
+            <a:r>
+              <a:rPr lang="en-US" sz="1150" dirty="0">
+                <a:solidFill>
+                  <a:srgbClr val="33302B"/>
+                </a:solidFill>
+                <a:latin typeface="Georgia" pitchFamily="34" charset="0"/>
+                <a:ea typeface="Georgia" pitchFamily="34" charset="-122"/>
+                <a:cs typeface="Georgia" pitchFamily="34" charset="-120"/>
+              </a:rPr>
+              <a:t>Choose the right store for a knowledge shape</a:t>
+            </a:r>
+            <a:endParaRPr lang="en-US" sz="1150" dirty="0"/>
+          </a:p>
+          <a:p>
+            <a:pPr marL="177800" indent="-177800">
+              <a:lnSpc>
+                <a:spcPct val="110000"/>
+              </a:lnSpc>
+              <a:spcAft>
+                <a:spcPts val="800"/>
+              </a:spcAft>
+              <a:buSzPct val="100000"/>
+              <a:buChar char="•"/>
+            </a:pPr>
+            <a:r>
+              <a:rPr lang="en-US" sz="1150" dirty="0">
+                <a:solidFill>
+                  <a:srgbClr val="33302B"/>
+                </a:solidFill>
+                <a:latin typeface="Georgia" pitchFamily="34" charset="0"/>
+                <a:ea typeface="Georgia" pitchFamily="34" charset="-122"/>
+                <a:cs typeface="Georgia" pitchFamily="34" charset="-120"/>
+              </a:rPr>
+              <a:t>Design a write-ceremony with provenance</a:t>
+            </a:r>
+            <a:endParaRPr lang="en-US" sz="1150" dirty="0"/>
+          </a:p>
+        </p:txBody>
+      </p:sp>
+      <p:sp>
+        <p:nvSpPr>
+          <p:cNvPr id="11" name="Text 9"/>
+          <p:cNvSpPr/>
+          <p:nvPr/>
+        </p:nvSpPr>
+        <p:spPr>
+          <a:xfrm>
+            <a:off x="566928" y="6473952"/>
+            <a:ext cx="9960559" cy="274320"/>
+          </a:xfrm>
+          <a:prstGeom prst="rect">
+            <a:avLst/>
+          </a:prstGeom>
+          <a:noFill/>
+          <a:ln/>
+        </p:spPr>
+        <p:txBody>
+          <a:bodyPr wrap="square" rtlCol="0" anchor="ctr"/>
+          <a:lstStyle/>
+          <a:p>
+            <a:pPr algn="l" indent="0" marL="0">
+              <a:buNone/>
+            </a:pPr>
+            <a:r>
+              <a:rPr lang="en-US" sz="900" i="1" dirty="0">
+                <a:solidFill>
+                  <a:srgbClr val="6E6A62"/>
+                </a:solidFill>
+                <a:latin typeface="Georgia" pitchFamily="34" charset="0"/>
+                <a:ea typeface="Georgia" pitchFamily="34" charset="-122"/>
+                <a:cs typeface="Georgia" pitchFamily="34" charset="-120"/>
+              </a:rPr>
+              <a:t>What the Structure Does Not Carry</a:t>
+            </a:r>
+            <a:pPr algn="l" indent="0" marL="0">
+              <a:buNone/>
+            </a:pPr>
+            <a:r>
+              <a:rPr lang="en-US" sz="900" dirty="0">
+                <a:solidFill>
+                  <a:srgbClr val="6E6A62"/>
+                </a:solidFill>
+                <a:latin typeface="Georgia" pitchFamily="34" charset="0"/>
+                <a:ea typeface="Georgia" pitchFamily="34" charset="-122"/>
+                <a:cs typeface="Georgia" pitchFamily="34" charset="-120"/>
+              </a:rPr>
+              <a:t>  ·  Professional Certificate — The Custody Architect</a:t>
+            </a:r>
+            <a:endParaRPr lang="en-US" sz="900" dirty="0"/>
+          </a:p>
+        </p:txBody>
+      </p:sp>
+      <p:sp>
+        <p:nvSpPr>
+          <p:cNvPr id="12" name="Text 10"/>
+          <p:cNvSpPr/>
+          <p:nvPr/>
+        </p:nvSpPr>
+        <p:spPr>
+          <a:xfrm>
+            <a:off x="10710367" y="6473952"/>
+            <a:ext cx="914400" cy="274320"/>
+          </a:xfrm>
+          <a:prstGeom prst="rect">
+            <a:avLst/>
+          </a:prstGeom>
+          <a:noFill/>
+          <a:ln/>
+        </p:spPr>
+        <p:txBody>
+          <a:bodyPr wrap="square" rtlCol="0" anchor="ctr"/>
+          <a:lstStyle/>
+          <a:p>
+            <a:pPr algn="r" indent="0" marL="0">
+              <a:buNone/>
+            </a:pPr>
+            <a:r>
+              <a:rPr lang="en-US" sz="900" dirty="0">
+                <a:solidFill>
+                  <a:srgbClr val="6E6A62"/>
+                </a:solidFill>
+                <a:latin typeface="Georgia" pitchFamily="34" charset="0"/>
+                <a:ea typeface="Georgia" pitchFamily="34" charset="-122"/>
+                <a:cs typeface="Georgia" pitchFamily="34" charset="-120"/>
+              </a:rPr>
+              <a:t>20</a:t>
+            </a:r>
+            <a:endParaRPr lang="en-US" sz="900" dirty="0"/>
+          </a:p>
+        </p:txBody>
+      </p:sp>
+    </p:spTree>
+  </p:cSld>
+  <p:clrMapOvr>
+    <a:masterClrMapping/>
+  </p:clrMapOvr>
+</p:sld>
+</file>
+
+<file path=ppt/slides/slide21.xml><?xml version="1.0" encoding="utf-8"?>
+<p:sld xmlns:a="http://schemas.openxmlformats.org/drawingml/2006/main" xmlns:r="http://schemas.openxmlformats.org/officeDocument/2006/relationships" xmlns:p="http://schemas.openxmlformats.org/presentationml/2006/main">
   <p:cSld name="Slide 20">
     <p:bg>
       <p:bgPr>
@@ -10181,7 +10738,7 @@
                 <a:ea typeface="Georgia" pitchFamily="34" charset="-122"/>
                 <a:cs typeface="Georgia" pitchFamily="34" charset="-120"/>
               </a:rPr>
-              <a:t>20</a:t>
+              <a:t>21</a:t>
             </a:r>
             <a:endParaRPr lang="en-US" sz="900" dirty="0"/>
           </a:p>
@@ -10195,7 +10752,7 @@
 </p:sld>
 </file>
 
-<file path=ppt/slides/slide21.xml><?xml version="1.0" encoding="utf-8"?>
+<file path=ppt/slides/slide22.xml><?xml version="1.0" encoding="utf-8"?>
 <p:sld xmlns:a="http://schemas.openxmlformats.org/drawingml/2006/main" xmlns:r="http://schemas.openxmlformats.org/officeDocument/2006/relationships" xmlns:p="http://schemas.openxmlformats.org/presentationml/2006/main">
   <p:cSld name="Slide 21">
     <p:bg>
@@ -10708,7 +11265,7 @@
                 <a:ea typeface="Georgia" pitchFamily="34" charset="-122"/>
                 <a:cs typeface="Georgia" pitchFamily="34" charset="-120"/>
               </a:rPr>
-              <a:t>21</a:t>
+              <a:t>22</a:t>
             </a:r>
             <a:endParaRPr lang="en-US" sz="900" dirty="0"/>
           </a:p>
@@ -10722,7 +11279,7 @@
 </p:sld>
 </file>
 
-<file path=ppt/slides/slide22.xml><?xml version="1.0" encoding="utf-8"?>
+<file path=ppt/slides/slide23.xml><?xml version="1.0" encoding="utf-8"?>
 <p:sld xmlns:a="http://schemas.openxmlformats.org/drawingml/2006/main" xmlns:r="http://schemas.openxmlformats.org/officeDocument/2006/relationships" xmlns:p="http://schemas.openxmlformats.org/presentationml/2006/main">
   <p:cSld name="Slide 22">
     <p:bg>
@@ -11214,7 +11771,7 @@
                 <a:ea typeface="Georgia" pitchFamily="34" charset="-122"/>
                 <a:cs typeface="Georgia" pitchFamily="34" charset="-120"/>
               </a:rPr>
-              <a:t>22</a:t>
+              <a:t>23</a:t>
             </a:r>
             <a:endParaRPr lang="en-US" sz="900" dirty="0"/>
           </a:p>
@@ -11228,7 +11785,7 @@
 </p:sld>
 </file>
 
-<file path=ppt/slides/slide23.xml><?xml version="1.0" encoding="utf-8"?>
+<file path=ppt/slides/slide24.xml><?xml version="1.0" encoding="utf-8"?>
 <p:sld xmlns:a="http://schemas.openxmlformats.org/drawingml/2006/main" xmlns:r="http://schemas.openxmlformats.org/officeDocument/2006/relationships" xmlns:p="http://schemas.openxmlformats.org/presentationml/2006/main">
   <p:cSld name="Slide 23">
     <p:bg>
@@ -11770,7 +12327,7 @@
                 <a:ea typeface="Georgia" pitchFamily="34" charset="-122"/>
                 <a:cs typeface="Georgia" pitchFamily="34" charset="-120"/>
               </a:rPr>
-              <a:t>23</a:t>
+              <a:t>24</a:t>
             </a:r>
             <a:endParaRPr lang="en-US" sz="900" dirty="0"/>
           </a:p>
@@ -11784,7 +12341,7 @@
 </p:sld>
 </file>
 
-<file path=ppt/slides/slide24.xml><?xml version="1.0" encoding="utf-8"?>
+<file path=ppt/slides/slide25.xml><?xml version="1.0" encoding="utf-8"?>
 <p:sld xmlns:a="http://schemas.openxmlformats.org/drawingml/2006/main" xmlns:r="http://schemas.openxmlformats.org/officeDocument/2006/relationships" xmlns:p="http://schemas.openxmlformats.org/presentationml/2006/main">
   <p:cSld name="Slide 24">
     <p:bg>
@@ -12297,7 +12854,7 @@
                 <a:ea typeface="Georgia" pitchFamily="34" charset="-122"/>
                 <a:cs typeface="Georgia" pitchFamily="34" charset="-120"/>
               </a:rPr>
-              <a:t>24</a:t>
+              <a:t>25</a:t>
             </a:r>
             <a:endParaRPr lang="en-US" sz="900" dirty="0"/>
           </a:p>
@@ -12311,7 +12868,7 @@
 </p:sld>
 </file>
 
-<file path=ppt/slides/slide25.xml><?xml version="1.0" encoding="utf-8"?>
+<file path=ppt/slides/slide26.xml><?xml version="1.0" encoding="utf-8"?>
 <p:sld xmlns:a="http://schemas.openxmlformats.org/drawingml/2006/main" xmlns:r="http://schemas.openxmlformats.org/officeDocument/2006/relationships" xmlns:p="http://schemas.openxmlformats.org/presentationml/2006/main">
   <p:cSld name="Slide 25">
     <p:bg>
@@ -12563,7 +13120,7 @@
                 <a:ea typeface="Georgia" pitchFamily="34" charset="-122"/>
                 <a:cs typeface="Georgia" pitchFamily="34" charset="-120"/>
               </a:rPr>
-              <a:t>25</a:t>
+              <a:t>26</a:t>
             </a:r>
             <a:endParaRPr lang="en-US" sz="900" dirty="0"/>
           </a:p>
@@ -12577,7 +13134,7 @@
 </p:sld>
 </file>
 
-<file path=ppt/slides/slide26.xml><?xml version="1.0" encoding="utf-8"?>
+<file path=ppt/slides/slide27.xml><?xml version="1.0" encoding="utf-8"?>
 <p:sld xmlns:a="http://schemas.openxmlformats.org/drawingml/2006/main" xmlns:r="http://schemas.openxmlformats.org/officeDocument/2006/relationships" xmlns:p="http://schemas.openxmlformats.org/presentationml/2006/main">
   <p:cSld name="Slide 26">
     <p:bg>
@@ -13069,7 +13626,7 @@
                 <a:ea typeface="Georgia" pitchFamily="34" charset="-122"/>
                 <a:cs typeface="Georgia" pitchFamily="34" charset="-120"/>
               </a:rPr>
-              <a:t>26</a:t>
+              <a:t>27</a:t>
             </a:r>
             <a:endParaRPr lang="en-US" sz="900" dirty="0"/>
           </a:p>
@@ -13083,7 +13640,7 @@
 </p:sld>
 </file>
 
-<file path=ppt/slides/slide27.xml><?xml version="1.0" encoding="utf-8"?>
+<file path=ppt/slides/slide28.xml><?xml version="1.0" encoding="utf-8"?>
 <p:sld xmlns:a="http://schemas.openxmlformats.org/drawingml/2006/main" xmlns:r="http://schemas.openxmlformats.org/officeDocument/2006/relationships" xmlns:p="http://schemas.openxmlformats.org/presentationml/2006/main">
   <p:cSld name="Slide 27">
     <p:bg>
@@ -14285,7 +14842,7 @@
                 <a:ea typeface="Georgia" pitchFamily="34" charset="-122"/>
                 <a:cs typeface="Georgia" pitchFamily="34" charset="-120"/>
               </a:rPr>
-              <a:t>27</a:t>
+              <a:t>28</a:t>
             </a:r>
             <a:endParaRPr lang="en-US" sz="900" dirty="0"/>
           </a:p>
@@ -14299,7 +14856,7 @@
 </p:sld>
 </file>
 
-<file path=ppt/slides/slide28.xml><?xml version="1.0" encoding="utf-8"?>
+<file path=ppt/slides/slide29.xml><?xml version="1.0" encoding="utf-8"?>
 <p:sld xmlns:a="http://schemas.openxmlformats.org/drawingml/2006/main" xmlns:r="http://schemas.openxmlformats.org/officeDocument/2006/relationships" xmlns:p="http://schemas.openxmlformats.org/presentationml/2006/main">
   <p:cSld name="Slide 28">
     <p:bg>
@@ -14782,512 +15339,6 @@
       <p:sp>
         <p:nvSpPr>
           <p:cNvPr id="15" name="Text 13"/>
-          <p:cNvSpPr/>
-          <p:nvPr/>
-        </p:nvSpPr>
-        <p:spPr>
-          <a:xfrm>
-            <a:off x="10710367" y="6473952"/>
-            <a:ext cx="914400" cy="274320"/>
-          </a:xfrm>
-          <a:prstGeom prst="rect">
-            <a:avLst/>
-          </a:prstGeom>
-          <a:noFill/>
-          <a:ln/>
-        </p:spPr>
-        <p:txBody>
-          <a:bodyPr wrap="square" rtlCol="0" anchor="ctr"/>
-          <a:lstStyle/>
-          <a:p>
-            <a:pPr algn="r" indent="0" marL="0">
-              <a:buNone/>
-            </a:pPr>
-            <a:r>
-              <a:rPr lang="en-US" sz="900" dirty="0">
-                <a:solidFill>
-                  <a:srgbClr val="6E6A62"/>
-                </a:solidFill>
-                <a:latin typeface="Georgia" pitchFamily="34" charset="0"/>
-                <a:ea typeface="Georgia" pitchFamily="34" charset="-122"/>
-                <a:cs typeface="Georgia" pitchFamily="34" charset="-120"/>
-              </a:rPr>
-              <a:t>28</a:t>
-            </a:r>
-            <a:endParaRPr lang="en-US" sz="900" dirty="0"/>
-          </a:p>
-        </p:txBody>
-      </p:sp>
-    </p:spTree>
-  </p:cSld>
-  <p:clrMapOvr>
-    <a:masterClrMapping/>
-  </p:clrMapOvr>
-</p:sld>
-</file>
-
-<file path=ppt/slides/slide29.xml><?xml version="1.0" encoding="utf-8"?>
-<p:sld xmlns:a="http://schemas.openxmlformats.org/drawingml/2006/main" xmlns:r="http://schemas.openxmlformats.org/officeDocument/2006/relationships" xmlns:p="http://schemas.openxmlformats.org/presentationml/2006/main">
-  <p:cSld name="Slide 29">
-    <p:bg>
-      <p:bgPr>
-        <a:solidFill>
-          <a:srgbClr val="F4F2EE"/>
-        </a:solidFill>
-      </p:bgPr>
-    </p:bg>
-    <p:spTree>
-      <p:nvGrpSpPr>
-        <p:cNvPr id="1" name=""/>
-        <p:cNvGrpSpPr/>
-        <p:nvPr/>
-      </p:nvGrpSpPr>
-      <p:grpSpPr>
-        <a:xfrm>
-          <a:off x="0" y="0"/>
-          <a:ext cx="0" cy="0"/>
-          <a:chOff x="0" y="0"/>
-          <a:chExt cx="0" cy="0"/>
-        </a:xfrm>
-      </p:grpSpPr>
-      <p:sp>
-        <p:nvSpPr>
-          <p:cNvPr id="2" name="Shape 0"/>
-          <p:cNvSpPr/>
-          <p:nvPr/>
-        </p:nvSpPr>
-        <p:spPr>
-          <a:xfrm>
-            <a:off x="0" y="0"/>
-            <a:ext cx="12191695" cy="1783080"/>
-          </a:xfrm>
-          <a:prstGeom prst="rect">
-            <a:avLst/>
-          </a:prstGeom>
-          <a:solidFill>
-            <a:srgbClr val="1B1A18"/>
-          </a:solidFill>
-          <a:ln/>
-        </p:spPr>
-      </p:sp>
-      <p:sp>
-        <p:nvSpPr>
-          <p:cNvPr id="3" name="Shape 1"/>
-          <p:cNvSpPr/>
-          <p:nvPr/>
-        </p:nvSpPr>
-        <p:spPr>
-          <a:xfrm>
-            <a:off x="566928" y="457200"/>
-            <a:ext cx="868680" cy="868680"/>
-          </a:xfrm>
-          <a:prstGeom prst="ellipse">
-            <a:avLst/>
-          </a:prstGeom>
-          <a:solidFill>
-            <a:srgbClr val="8A8378"/>
-          </a:solidFill>
-          <a:ln/>
-        </p:spPr>
-      </p:sp>
-      <p:sp>
-        <p:nvSpPr>
-          <p:cNvPr id="4" name="Text 2"/>
-          <p:cNvSpPr/>
-          <p:nvPr/>
-        </p:nvSpPr>
-        <p:spPr>
-          <a:xfrm>
-            <a:off x="566928" y="457200"/>
-            <a:ext cx="868680" cy="868680"/>
-          </a:xfrm>
-          <a:prstGeom prst="rect">
-            <a:avLst/>
-          </a:prstGeom>
-          <a:noFill/>
-          <a:ln/>
-        </p:spPr>
-        <p:txBody>
-          <a:bodyPr wrap="square" rtlCol="0" anchor="ctr"/>
-          <a:lstStyle/>
-          <a:p>
-            <a:pPr algn="ctr" indent="0" marL="0">
-              <a:lnSpc>
-                <a:spcPct val="90000"/>
-              </a:lnSpc>
-              <a:buNone/>
-            </a:pPr>
-            <a:r>
-              <a:rPr lang="en-US" sz="1400" b="1" dirty="0">
-                <a:solidFill>
-                  <a:srgbClr val="1B1A18"/>
-                </a:solidFill>
-                <a:latin typeface="Georgia" pitchFamily="34" charset="0"/>
-                <a:ea typeface="Georgia" pitchFamily="34" charset="-122"/>
-                <a:cs typeface="Georgia" pitchFamily="34" charset="-120"/>
-              </a:rPr>
-              <a:t>WK</a:t>
-            </a:r>
-            <a:endParaRPr lang="en-US" sz="1400" dirty="0"/>
-          </a:p>
-          <a:p>
-            <a:pPr algn="ctr" indent="0" marL="0">
-              <a:lnSpc>
-                <a:spcPct val="90000"/>
-              </a:lnSpc>
-              <a:buNone/>
-            </a:pPr>
-            <a:r>
-              <a:rPr lang="en-US" sz="1400" b="1" dirty="0">
-                <a:solidFill>
-                  <a:srgbClr val="1B1A18"/>
-                </a:solidFill>
-                <a:latin typeface="Georgia" pitchFamily="34" charset="0"/>
-                <a:ea typeface="Georgia" pitchFamily="34" charset="-122"/>
-                <a:cs typeface="Georgia" pitchFamily="34" charset="-120"/>
-              </a:rPr>
-              <a:t>8</a:t>
-            </a:r>
-            <a:endParaRPr lang="en-US" sz="1400" dirty="0"/>
-          </a:p>
-        </p:txBody>
-      </p:sp>
-      <p:sp>
-        <p:nvSpPr>
-          <p:cNvPr id="5" name="Text 3"/>
-          <p:cNvSpPr/>
-          <p:nvPr/>
-        </p:nvSpPr>
-        <p:spPr>
-          <a:xfrm>
-            <a:off x="1600200" y="457200"/>
-            <a:ext cx="10058400" cy="868680"/>
-          </a:xfrm>
-          <a:prstGeom prst="rect">
-            <a:avLst/>
-          </a:prstGeom>
-          <a:noFill/>
-          <a:ln/>
-        </p:spPr>
-        <p:txBody>
-          <a:bodyPr wrap="square" rtlCol="0" anchor="ctr"/>
-          <a:lstStyle/>
-          <a:p>
-            <a:pPr indent="0" marL="0">
-              <a:buNone/>
-            </a:pPr>
-            <a:r>
-              <a:rPr lang="en-US" sz="2250" b="1" dirty="0">
-                <a:solidFill>
-                  <a:srgbClr val="FFFFFF"/>
-                </a:solidFill>
-                <a:latin typeface="Georgia" pitchFamily="34" charset="0"/>
-                <a:ea typeface="Georgia" pitchFamily="34" charset="-122"/>
-                <a:cs typeface="Georgia" pitchFamily="34" charset="-120"/>
-              </a:rPr>
-              <a:t>The custody rules &amp; capstone review</a:t>
-            </a:r>
-            <a:endParaRPr lang="en-US" sz="2250" dirty="0"/>
-          </a:p>
-        </p:txBody>
-      </p:sp>
-      <p:sp>
-        <p:nvSpPr>
-          <p:cNvPr id="6" name="Text 4"/>
-          <p:cNvSpPr/>
-          <p:nvPr/>
-        </p:nvSpPr>
-        <p:spPr>
-          <a:xfrm>
-            <a:off x="566928" y="2103120"/>
-            <a:ext cx="4572000" cy="320040"/>
-          </a:xfrm>
-          <a:prstGeom prst="rect">
-            <a:avLst/>
-          </a:prstGeom>
-          <a:noFill/>
-          <a:ln/>
-        </p:spPr>
-        <p:txBody>
-          <a:bodyPr wrap="square" rtlCol="0" anchor="ctr"/>
-          <a:lstStyle/>
-          <a:p>
-            <a:pPr indent="0" marL="0">
-              <a:buNone/>
-            </a:pPr>
-            <a:r>
-              <a:rPr lang="en-US" sz="1050" b="1" spc="100" kern="0" dirty="0">
-                <a:solidFill>
-                  <a:srgbClr val="8A8378"/>
-                </a:solidFill>
-                <a:latin typeface="Georgia" pitchFamily="34" charset="0"/>
-                <a:ea typeface="Georgia" pitchFamily="34" charset="-122"/>
-                <a:cs typeface="Georgia" pitchFamily="34" charset="-120"/>
-              </a:rPr>
-              <a:t>THIS WEEK</a:t>
-            </a:r>
-            <a:endParaRPr lang="en-US" sz="1150" dirty="0"/>
-          </a:p>
-        </p:txBody>
-      </p:sp>
-      <p:sp>
-        <p:nvSpPr>
-          <p:cNvPr id="7" name="Text 5"/>
-          <p:cNvSpPr/>
-          <p:nvPr/>
-        </p:nvSpPr>
-        <p:spPr>
-          <a:xfrm>
-            <a:off x="566928" y="2468880"/>
-            <a:ext cx="6492240" cy="3291840"/>
-          </a:xfrm>
-          <a:prstGeom prst="rect">
-            <a:avLst/>
-          </a:prstGeom>
-          <a:noFill/>
-          <a:ln/>
-        </p:spPr>
-        <p:txBody>
-          <a:bodyPr wrap="square" rtlCol="0" anchor="t"/>
-          <a:lstStyle/>
-          <a:p>
-            <a:pPr indent="0" marL="0">
-              <a:lnSpc>
-                <a:spcPct val="130000"/>
-              </a:lnSpc>
-              <a:buNone/>
-            </a:pPr>
-            <a:r>
-              <a:rPr lang="en-US" sz="1400" dirty="0">
-                <a:solidFill>
-                  <a:srgbClr val="33302B"/>
-                </a:solidFill>
-                <a:latin typeface="Georgia" pitchFamily="34" charset="0"/>
-                <a:ea typeface="Georgia" pitchFamily="34" charset="-122"/>
-                <a:cs typeface="Georgia" pitchFamily="34" charset="-120"/>
-              </a:rPr>
-              <a:t>We close with the six custody rules and the rule above them, then review capstone drafts. Your deliverable — an evaluation report and remediation plan for a real system — is the certificate’s proof that you can not only see custody failures but specify how to fix them.</a:t>
-            </a:r>
-            <a:endParaRPr lang="en-US" sz="1400" dirty="0"/>
-          </a:p>
-        </p:txBody>
-      </p:sp>
-      <p:sp>
-        <p:nvSpPr>
-          <p:cNvPr id="8" name="Shape 6"/>
-          <p:cNvSpPr/>
-          <p:nvPr/>
-        </p:nvSpPr>
-        <p:spPr>
-          <a:xfrm>
-            <a:off x="7452360" y="2103120"/>
-            <a:ext cx="4172407" cy="3840480"/>
-          </a:xfrm>
-          <a:prstGeom prst="roundRect">
-            <a:avLst>
-              <a:gd name="adj" fmla="val 2381"/>
-            </a:avLst>
-          </a:prstGeom>
-          <a:solidFill>
-            <a:srgbClr val="FFFFFF"/>
-          </a:solidFill>
-          <a:ln w="12700">
-            <a:solidFill>
-              <a:srgbClr val="EBE7DF"/>
-            </a:solidFill>
-            <a:prstDash val="solid"/>
-          </a:ln>
-        </p:spPr>
-      </p:sp>
-      <p:sp>
-        <p:nvSpPr>
-          <p:cNvPr id="9" name="Text 7"/>
-          <p:cNvSpPr/>
-          <p:nvPr/>
-        </p:nvSpPr>
-        <p:spPr>
-          <a:xfrm>
-            <a:off x="7680960" y="2286000"/>
-            <a:ext cx="3840480" cy="365760"/>
-          </a:xfrm>
-          <a:prstGeom prst="rect">
-            <a:avLst/>
-          </a:prstGeom>
-          <a:noFill/>
-          <a:ln/>
-        </p:spPr>
-        <p:txBody>
-          <a:bodyPr wrap="square" rtlCol="0" anchor="ctr"/>
-          <a:lstStyle/>
-          <a:p>
-            <a:pPr indent="0" marL="0">
-              <a:buNone/>
-            </a:pPr>
-            <a:r>
-              <a:rPr lang="en-US" sz="1300" b="1" dirty="0">
-                <a:solidFill>
-                  <a:srgbClr val="1B1A18"/>
-                </a:solidFill>
-                <a:latin typeface="Georgia" pitchFamily="34" charset="0"/>
-                <a:ea typeface="Georgia" pitchFamily="34" charset="-122"/>
-                <a:cs typeface="Georgia" pitchFamily="34" charset="-120"/>
-              </a:rPr>
-              <a:t>You will be able to…</a:t>
-            </a:r>
-            <a:endParaRPr lang="en-US" sz="1300" dirty="0"/>
-          </a:p>
-        </p:txBody>
-      </p:sp>
-      <p:sp>
-        <p:nvSpPr>
-          <p:cNvPr id="10" name="Text 8"/>
-          <p:cNvSpPr/>
-          <p:nvPr/>
-        </p:nvSpPr>
-        <p:spPr>
-          <a:xfrm>
-            <a:off x="7680960" y="2697480"/>
-            <a:ext cx="3703320" cy="3108960"/>
-          </a:xfrm>
-          <a:prstGeom prst="rect">
-            <a:avLst/>
-          </a:prstGeom>
-          <a:noFill/>
-          <a:ln/>
-        </p:spPr>
-        <p:txBody>
-          <a:bodyPr wrap="square" rtlCol="0" anchor="t"/>
-          <a:lstStyle/>
-          <a:p>
-            <a:pPr marL="177800" indent="-177800">
-              <a:lnSpc>
-                <a:spcPct val="110000"/>
-              </a:lnSpc>
-              <a:spcAft>
-                <a:spcPts val="800"/>
-              </a:spcAft>
-              <a:buSzPct val="100000"/>
-              <a:buChar char="•"/>
-            </a:pPr>
-            <a:r>
-              <a:rPr lang="en-US" sz="1150" dirty="0">
-                <a:solidFill>
-                  <a:srgbClr val="33302B"/>
-                </a:solidFill>
-                <a:latin typeface="Georgia" pitchFamily="34" charset="0"/>
-                <a:ea typeface="Georgia" pitchFamily="34" charset="-122"/>
-                <a:cs typeface="Georgia" pitchFamily="34" charset="-120"/>
-              </a:rPr>
-              <a:t>Recall the six custody rules</a:t>
-            </a:r>
-            <a:endParaRPr lang="en-US" sz="1150" dirty="0"/>
-          </a:p>
-          <a:p>
-            <a:pPr marL="177800" indent="-177800">
-              <a:lnSpc>
-                <a:spcPct val="110000"/>
-              </a:lnSpc>
-              <a:spcAft>
-                <a:spcPts val="800"/>
-              </a:spcAft>
-              <a:buSzPct val="100000"/>
-              <a:buChar char="•"/>
-            </a:pPr>
-            <a:r>
-              <a:rPr lang="en-US" sz="1150" dirty="0">
-                <a:solidFill>
-                  <a:srgbClr val="33302B"/>
-                </a:solidFill>
-                <a:latin typeface="Georgia" pitchFamily="34" charset="0"/>
-                <a:ea typeface="Georgia" pitchFamily="34" charset="-122"/>
-                <a:cs typeface="Georgia" pitchFamily="34" charset="-120"/>
-              </a:rPr>
-              <a:t>State the rule above the rules</a:t>
-            </a:r>
-            <a:endParaRPr lang="en-US" sz="1150" dirty="0"/>
-          </a:p>
-          <a:p>
-            <a:pPr marL="177800" indent="-177800">
-              <a:lnSpc>
-                <a:spcPct val="110000"/>
-              </a:lnSpc>
-              <a:spcAft>
-                <a:spcPts val="800"/>
-              </a:spcAft>
-              <a:buSzPct val="100000"/>
-              <a:buChar char="•"/>
-            </a:pPr>
-            <a:r>
-              <a:rPr lang="en-US" sz="1150" dirty="0">
-                <a:solidFill>
-                  <a:srgbClr val="33302B"/>
-                </a:solidFill>
-                <a:latin typeface="Georgia" pitchFamily="34" charset="0"/>
-                <a:ea typeface="Georgia" pitchFamily="34" charset="-122"/>
-                <a:cs typeface="Georgia" pitchFamily="34" charset="-120"/>
-              </a:rPr>
-              <a:t>Finalise your evaluation report and remediation plan</a:t>
-            </a:r>
-            <a:endParaRPr lang="en-US" sz="1150" dirty="0"/>
-          </a:p>
-        </p:txBody>
-      </p:sp>
-      <p:sp>
-        <p:nvSpPr>
-          <p:cNvPr id="11" name="Text 9"/>
-          <p:cNvSpPr/>
-          <p:nvPr/>
-        </p:nvSpPr>
-        <p:spPr>
-          <a:xfrm>
-            <a:off x="566928" y="6473952"/>
-            <a:ext cx="9960559" cy="274320"/>
-          </a:xfrm>
-          <a:prstGeom prst="rect">
-            <a:avLst/>
-          </a:prstGeom>
-          <a:noFill/>
-          <a:ln/>
-        </p:spPr>
-        <p:txBody>
-          <a:bodyPr wrap="square" rtlCol="0" anchor="ctr"/>
-          <a:lstStyle/>
-          <a:p>
-            <a:pPr algn="l" indent="0" marL="0">
-              <a:buNone/>
-            </a:pPr>
-            <a:r>
-              <a:rPr lang="en-US" sz="900" i="1" dirty="0">
-                <a:solidFill>
-                  <a:srgbClr val="6E6A62"/>
-                </a:solidFill>
-                <a:latin typeface="Georgia" pitchFamily="34" charset="0"/>
-                <a:ea typeface="Georgia" pitchFamily="34" charset="-122"/>
-                <a:cs typeface="Georgia" pitchFamily="34" charset="-120"/>
-              </a:rPr>
-              <a:t>What the Structure Does Not Carry</a:t>
-            </a:r>
-            <a:pPr algn="l" indent="0" marL="0">
-              <a:buNone/>
-            </a:pPr>
-            <a:r>
-              <a:rPr lang="en-US" sz="900" dirty="0">
-                <a:solidFill>
-                  <a:srgbClr val="6E6A62"/>
-                </a:solidFill>
-                <a:latin typeface="Georgia" pitchFamily="34" charset="0"/>
-                <a:ea typeface="Georgia" pitchFamily="34" charset="-122"/>
-                <a:cs typeface="Georgia" pitchFamily="34" charset="-120"/>
-              </a:rPr>
-              <a:t>  ·  Professional Certificate — The Custody Architect</a:t>
-            </a:r>
-            <a:endParaRPr lang="en-US" sz="900" dirty="0"/>
-          </a:p>
-        </p:txBody>
-      </p:sp>
-      <p:sp>
-        <p:nvSpPr>
-          <p:cNvPr id="12" name="Text 10"/>
           <p:cNvSpPr/>
           <p:nvPr/>
         </p:nvSpPr>
@@ -15840,6 +15891,512 @@
 
 <file path=ppt/slides/slide30.xml><?xml version="1.0" encoding="utf-8"?>
 <p:sld xmlns:a="http://schemas.openxmlformats.org/drawingml/2006/main" xmlns:r="http://schemas.openxmlformats.org/officeDocument/2006/relationships" xmlns:p="http://schemas.openxmlformats.org/presentationml/2006/main">
+  <p:cSld name="Slide 29">
+    <p:bg>
+      <p:bgPr>
+        <a:solidFill>
+          <a:srgbClr val="F4F2EE"/>
+        </a:solidFill>
+      </p:bgPr>
+    </p:bg>
+    <p:spTree>
+      <p:nvGrpSpPr>
+        <p:cNvPr id="1" name=""/>
+        <p:cNvGrpSpPr/>
+        <p:nvPr/>
+      </p:nvGrpSpPr>
+      <p:grpSpPr>
+        <a:xfrm>
+          <a:off x="0" y="0"/>
+          <a:ext cx="0" cy="0"/>
+          <a:chOff x="0" y="0"/>
+          <a:chExt cx="0" cy="0"/>
+        </a:xfrm>
+      </p:grpSpPr>
+      <p:sp>
+        <p:nvSpPr>
+          <p:cNvPr id="2" name="Shape 0"/>
+          <p:cNvSpPr/>
+          <p:nvPr/>
+        </p:nvSpPr>
+        <p:spPr>
+          <a:xfrm>
+            <a:off x="0" y="0"/>
+            <a:ext cx="12191695" cy="1783080"/>
+          </a:xfrm>
+          <a:prstGeom prst="rect">
+            <a:avLst/>
+          </a:prstGeom>
+          <a:solidFill>
+            <a:srgbClr val="1B1A18"/>
+          </a:solidFill>
+          <a:ln/>
+        </p:spPr>
+      </p:sp>
+      <p:sp>
+        <p:nvSpPr>
+          <p:cNvPr id="3" name="Shape 1"/>
+          <p:cNvSpPr/>
+          <p:nvPr/>
+        </p:nvSpPr>
+        <p:spPr>
+          <a:xfrm>
+            <a:off x="566928" y="457200"/>
+            <a:ext cx="868680" cy="868680"/>
+          </a:xfrm>
+          <a:prstGeom prst="ellipse">
+            <a:avLst/>
+          </a:prstGeom>
+          <a:solidFill>
+            <a:srgbClr val="8A8378"/>
+          </a:solidFill>
+          <a:ln/>
+        </p:spPr>
+      </p:sp>
+      <p:sp>
+        <p:nvSpPr>
+          <p:cNvPr id="4" name="Text 2"/>
+          <p:cNvSpPr/>
+          <p:nvPr/>
+        </p:nvSpPr>
+        <p:spPr>
+          <a:xfrm>
+            <a:off x="566928" y="457200"/>
+            <a:ext cx="868680" cy="868680"/>
+          </a:xfrm>
+          <a:prstGeom prst="rect">
+            <a:avLst/>
+          </a:prstGeom>
+          <a:noFill/>
+          <a:ln/>
+        </p:spPr>
+        <p:txBody>
+          <a:bodyPr wrap="square" rtlCol="0" anchor="ctr"/>
+          <a:lstStyle/>
+          <a:p>
+            <a:pPr algn="ctr" indent="0" marL="0">
+              <a:lnSpc>
+                <a:spcPct val="90000"/>
+              </a:lnSpc>
+              <a:buNone/>
+            </a:pPr>
+            <a:r>
+              <a:rPr lang="en-US" sz="1400" b="1" dirty="0">
+                <a:solidFill>
+                  <a:srgbClr val="1B1A18"/>
+                </a:solidFill>
+                <a:latin typeface="Georgia" pitchFamily="34" charset="0"/>
+                <a:ea typeface="Georgia" pitchFamily="34" charset="-122"/>
+                <a:cs typeface="Georgia" pitchFamily="34" charset="-120"/>
+              </a:rPr>
+              <a:t>WK</a:t>
+            </a:r>
+            <a:endParaRPr lang="en-US" sz="1400" dirty="0"/>
+          </a:p>
+          <a:p>
+            <a:pPr algn="ctr" indent="0" marL="0">
+              <a:lnSpc>
+                <a:spcPct val="90000"/>
+              </a:lnSpc>
+              <a:buNone/>
+            </a:pPr>
+            <a:r>
+              <a:rPr lang="en-US" sz="1400" b="1" dirty="0">
+                <a:solidFill>
+                  <a:srgbClr val="1B1A18"/>
+                </a:solidFill>
+                <a:latin typeface="Georgia" pitchFamily="34" charset="0"/>
+                <a:ea typeface="Georgia" pitchFamily="34" charset="-122"/>
+                <a:cs typeface="Georgia" pitchFamily="34" charset="-120"/>
+              </a:rPr>
+              <a:t>8</a:t>
+            </a:r>
+            <a:endParaRPr lang="en-US" sz="1400" dirty="0"/>
+          </a:p>
+        </p:txBody>
+      </p:sp>
+      <p:sp>
+        <p:nvSpPr>
+          <p:cNvPr id="5" name="Text 3"/>
+          <p:cNvSpPr/>
+          <p:nvPr/>
+        </p:nvSpPr>
+        <p:spPr>
+          <a:xfrm>
+            <a:off x="1600200" y="457200"/>
+            <a:ext cx="10058400" cy="868680"/>
+          </a:xfrm>
+          <a:prstGeom prst="rect">
+            <a:avLst/>
+          </a:prstGeom>
+          <a:noFill/>
+          <a:ln/>
+        </p:spPr>
+        <p:txBody>
+          <a:bodyPr wrap="square" rtlCol="0" anchor="ctr"/>
+          <a:lstStyle/>
+          <a:p>
+            <a:pPr indent="0" marL="0">
+              <a:buNone/>
+            </a:pPr>
+            <a:r>
+              <a:rPr lang="en-US" sz="2250" b="1" dirty="0">
+                <a:solidFill>
+                  <a:srgbClr val="FFFFFF"/>
+                </a:solidFill>
+                <a:latin typeface="Georgia" pitchFamily="34" charset="0"/>
+                <a:ea typeface="Georgia" pitchFamily="34" charset="-122"/>
+                <a:cs typeface="Georgia" pitchFamily="34" charset="-120"/>
+              </a:rPr>
+              <a:t>The custody rules &amp; capstone review</a:t>
+            </a:r>
+            <a:endParaRPr lang="en-US" sz="2250" dirty="0"/>
+          </a:p>
+        </p:txBody>
+      </p:sp>
+      <p:sp>
+        <p:nvSpPr>
+          <p:cNvPr id="6" name="Text 4"/>
+          <p:cNvSpPr/>
+          <p:nvPr/>
+        </p:nvSpPr>
+        <p:spPr>
+          <a:xfrm>
+            <a:off x="566928" y="2103120"/>
+            <a:ext cx="4572000" cy="320040"/>
+          </a:xfrm>
+          <a:prstGeom prst="rect">
+            <a:avLst/>
+          </a:prstGeom>
+          <a:noFill/>
+          <a:ln/>
+        </p:spPr>
+        <p:txBody>
+          <a:bodyPr wrap="square" rtlCol="0" anchor="ctr"/>
+          <a:lstStyle/>
+          <a:p>
+            <a:pPr indent="0" marL="0">
+              <a:buNone/>
+            </a:pPr>
+            <a:r>
+              <a:rPr lang="en-US" sz="1050" b="1" spc="100" kern="0" dirty="0">
+                <a:solidFill>
+                  <a:srgbClr val="8A8378"/>
+                </a:solidFill>
+                <a:latin typeface="Georgia" pitchFamily="34" charset="0"/>
+                <a:ea typeface="Georgia" pitchFamily="34" charset="-122"/>
+                <a:cs typeface="Georgia" pitchFamily="34" charset="-120"/>
+              </a:rPr>
+              <a:t>THIS WEEK</a:t>
+            </a:r>
+            <a:endParaRPr lang="en-US" sz="1150" dirty="0"/>
+          </a:p>
+        </p:txBody>
+      </p:sp>
+      <p:sp>
+        <p:nvSpPr>
+          <p:cNvPr id="7" name="Text 5"/>
+          <p:cNvSpPr/>
+          <p:nvPr/>
+        </p:nvSpPr>
+        <p:spPr>
+          <a:xfrm>
+            <a:off x="566928" y="2468880"/>
+            <a:ext cx="6492240" cy="3291840"/>
+          </a:xfrm>
+          <a:prstGeom prst="rect">
+            <a:avLst/>
+          </a:prstGeom>
+          <a:noFill/>
+          <a:ln/>
+        </p:spPr>
+        <p:txBody>
+          <a:bodyPr wrap="square" rtlCol="0" anchor="t"/>
+          <a:lstStyle/>
+          <a:p>
+            <a:pPr indent="0" marL="0">
+              <a:lnSpc>
+                <a:spcPct val="130000"/>
+              </a:lnSpc>
+              <a:buNone/>
+            </a:pPr>
+            <a:r>
+              <a:rPr lang="en-US" sz="1400" dirty="0">
+                <a:solidFill>
+                  <a:srgbClr val="33302B"/>
+                </a:solidFill>
+                <a:latin typeface="Georgia" pitchFamily="34" charset="0"/>
+                <a:ea typeface="Georgia" pitchFamily="34" charset="-122"/>
+                <a:cs typeface="Georgia" pitchFamily="34" charset="-120"/>
+              </a:rPr>
+              <a:t>We close with the six custody rules and the rule above them, then review capstone drafts. Your deliverable — an evaluation report and remediation plan for a real system — is the certificate’s proof that you can not only see custody failures but specify how to fix them.</a:t>
+            </a:r>
+            <a:endParaRPr lang="en-US" sz="1400" dirty="0"/>
+          </a:p>
+        </p:txBody>
+      </p:sp>
+      <p:sp>
+        <p:nvSpPr>
+          <p:cNvPr id="8" name="Shape 6"/>
+          <p:cNvSpPr/>
+          <p:nvPr/>
+        </p:nvSpPr>
+        <p:spPr>
+          <a:xfrm>
+            <a:off x="7452360" y="2103120"/>
+            <a:ext cx="4172407" cy="3840480"/>
+          </a:xfrm>
+          <a:prstGeom prst="roundRect">
+            <a:avLst>
+              <a:gd name="adj" fmla="val 2381"/>
+            </a:avLst>
+          </a:prstGeom>
+          <a:solidFill>
+            <a:srgbClr val="FFFFFF"/>
+          </a:solidFill>
+          <a:ln w="12700">
+            <a:solidFill>
+              <a:srgbClr val="EBE7DF"/>
+            </a:solidFill>
+            <a:prstDash val="solid"/>
+          </a:ln>
+        </p:spPr>
+      </p:sp>
+      <p:sp>
+        <p:nvSpPr>
+          <p:cNvPr id="9" name="Text 7"/>
+          <p:cNvSpPr/>
+          <p:nvPr/>
+        </p:nvSpPr>
+        <p:spPr>
+          <a:xfrm>
+            <a:off x="7680960" y="2286000"/>
+            <a:ext cx="3840480" cy="365760"/>
+          </a:xfrm>
+          <a:prstGeom prst="rect">
+            <a:avLst/>
+          </a:prstGeom>
+          <a:noFill/>
+          <a:ln/>
+        </p:spPr>
+        <p:txBody>
+          <a:bodyPr wrap="square" rtlCol="0" anchor="ctr"/>
+          <a:lstStyle/>
+          <a:p>
+            <a:pPr indent="0" marL="0">
+              <a:buNone/>
+            </a:pPr>
+            <a:r>
+              <a:rPr lang="en-US" sz="1300" b="1" dirty="0">
+                <a:solidFill>
+                  <a:srgbClr val="1B1A18"/>
+                </a:solidFill>
+                <a:latin typeface="Georgia" pitchFamily="34" charset="0"/>
+                <a:ea typeface="Georgia" pitchFamily="34" charset="-122"/>
+                <a:cs typeface="Georgia" pitchFamily="34" charset="-120"/>
+              </a:rPr>
+              <a:t>You will be able to…</a:t>
+            </a:r>
+            <a:endParaRPr lang="en-US" sz="1300" dirty="0"/>
+          </a:p>
+        </p:txBody>
+      </p:sp>
+      <p:sp>
+        <p:nvSpPr>
+          <p:cNvPr id="10" name="Text 8"/>
+          <p:cNvSpPr/>
+          <p:nvPr/>
+        </p:nvSpPr>
+        <p:spPr>
+          <a:xfrm>
+            <a:off x="7680960" y="2697480"/>
+            <a:ext cx="3703320" cy="3108960"/>
+          </a:xfrm>
+          <a:prstGeom prst="rect">
+            <a:avLst/>
+          </a:prstGeom>
+          <a:noFill/>
+          <a:ln/>
+        </p:spPr>
+        <p:txBody>
+          <a:bodyPr wrap="square" rtlCol="0" anchor="t"/>
+          <a:lstStyle/>
+          <a:p>
+            <a:pPr marL="177800" indent="-177800">
+              <a:lnSpc>
+                <a:spcPct val="110000"/>
+              </a:lnSpc>
+              <a:spcAft>
+                <a:spcPts val="800"/>
+              </a:spcAft>
+              <a:buSzPct val="100000"/>
+              <a:buChar char="•"/>
+            </a:pPr>
+            <a:r>
+              <a:rPr lang="en-US" sz="1150" dirty="0">
+                <a:solidFill>
+                  <a:srgbClr val="33302B"/>
+                </a:solidFill>
+                <a:latin typeface="Georgia" pitchFamily="34" charset="0"/>
+                <a:ea typeface="Georgia" pitchFamily="34" charset="-122"/>
+                <a:cs typeface="Georgia" pitchFamily="34" charset="-120"/>
+              </a:rPr>
+              <a:t>Recall the six custody rules</a:t>
+            </a:r>
+            <a:endParaRPr lang="en-US" sz="1150" dirty="0"/>
+          </a:p>
+          <a:p>
+            <a:pPr marL="177800" indent="-177800">
+              <a:lnSpc>
+                <a:spcPct val="110000"/>
+              </a:lnSpc>
+              <a:spcAft>
+                <a:spcPts val="800"/>
+              </a:spcAft>
+              <a:buSzPct val="100000"/>
+              <a:buChar char="•"/>
+            </a:pPr>
+            <a:r>
+              <a:rPr lang="en-US" sz="1150" dirty="0">
+                <a:solidFill>
+                  <a:srgbClr val="33302B"/>
+                </a:solidFill>
+                <a:latin typeface="Georgia" pitchFamily="34" charset="0"/>
+                <a:ea typeface="Georgia" pitchFamily="34" charset="-122"/>
+                <a:cs typeface="Georgia" pitchFamily="34" charset="-120"/>
+              </a:rPr>
+              <a:t>State the rule above the rules</a:t>
+            </a:r>
+            <a:endParaRPr lang="en-US" sz="1150" dirty="0"/>
+          </a:p>
+          <a:p>
+            <a:pPr marL="177800" indent="-177800">
+              <a:lnSpc>
+                <a:spcPct val="110000"/>
+              </a:lnSpc>
+              <a:spcAft>
+                <a:spcPts val="800"/>
+              </a:spcAft>
+              <a:buSzPct val="100000"/>
+              <a:buChar char="•"/>
+            </a:pPr>
+            <a:r>
+              <a:rPr lang="en-US" sz="1150" dirty="0">
+                <a:solidFill>
+                  <a:srgbClr val="33302B"/>
+                </a:solidFill>
+                <a:latin typeface="Georgia" pitchFamily="34" charset="0"/>
+                <a:ea typeface="Georgia" pitchFamily="34" charset="-122"/>
+                <a:cs typeface="Georgia" pitchFamily="34" charset="-120"/>
+              </a:rPr>
+              <a:t>Finalise your evaluation report and remediation plan</a:t>
+            </a:r>
+            <a:endParaRPr lang="en-US" sz="1150" dirty="0"/>
+          </a:p>
+        </p:txBody>
+      </p:sp>
+      <p:sp>
+        <p:nvSpPr>
+          <p:cNvPr id="11" name="Text 9"/>
+          <p:cNvSpPr/>
+          <p:nvPr/>
+        </p:nvSpPr>
+        <p:spPr>
+          <a:xfrm>
+            <a:off x="566928" y="6473952"/>
+            <a:ext cx="9960559" cy="274320"/>
+          </a:xfrm>
+          <a:prstGeom prst="rect">
+            <a:avLst/>
+          </a:prstGeom>
+          <a:noFill/>
+          <a:ln/>
+        </p:spPr>
+        <p:txBody>
+          <a:bodyPr wrap="square" rtlCol="0" anchor="ctr"/>
+          <a:lstStyle/>
+          <a:p>
+            <a:pPr algn="l" indent="0" marL="0">
+              <a:buNone/>
+            </a:pPr>
+            <a:r>
+              <a:rPr lang="en-US" sz="900" i="1" dirty="0">
+                <a:solidFill>
+                  <a:srgbClr val="6E6A62"/>
+                </a:solidFill>
+                <a:latin typeface="Georgia" pitchFamily="34" charset="0"/>
+                <a:ea typeface="Georgia" pitchFamily="34" charset="-122"/>
+                <a:cs typeface="Georgia" pitchFamily="34" charset="-120"/>
+              </a:rPr>
+              <a:t>What the Structure Does Not Carry</a:t>
+            </a:r>
+            <a:pPr algn="l" indent="0" marL="0">
+              <a:buNone/>
+            </a:pPr>
+            <a:r>
+              <a:rPr lang="en-US" sz="900" dirty="0">
+                <a:solidFill>
+                  <a:srgbClr val="6E6A62"/>
+                </a:solidFill>
+                <a:latin typeface="Georgia" pitchFamily="34" charset="0"/>
+                <a:ea typeface="Georgia" pitchFamily="34" charset="-122"/>
+                <a:cs typeface="Georgia" pitchFamily="34" charset="-120"/>
+              </a:rPr>
+              <a:t>  ·  Professional Certificate — The Custody Architect</a:t>
+            </a:r>
+            <a:endParaRPr lang="en-US" sz="900" dirty="0"/>
+          </a:p>
+        </p:txBody>
+      </p:sp>
+      <p:sp>
+        <p:nvSpPr>
+          <p:cNvPr id="12" name="Text 10"/>
+          <p:cNvSpPr/>
+          <p:nvPr/>
+        </p:nvSpPr>
+        <p:spPr>
+          <a:xfrm>
+            <a:off x="10710367" y="6473952"/>
+            <a:ext cx="914400" cy="274320"/>
+          </a:xfrm>
+          <a:prstGeom prst="rect">
+            <a:avLst/>
+          </a:prstGeom>
+          <a:noFill/>
+          <a:ln/>
+        </p:spPr>
+        <p:txBody>
+          <a:bodyPr wrap="square" rtlCol="0" anchor="ctr"/>
+          <a:lstStyle/>
+          <a:p>
+            <a:pPr algn="r" indent="0" marL="0">
+              <a:buNone/>
+            </a:pPr>
+            <a:r>
+              <a:rPr lang="en-US" sz="900" dirty="0">
+                <a:solidFill>
+                  <a:srgbClr val="6E6A62"/>
+                </a:solidFill>
+                <a:latin typeface="Georgia" pitchFamily="34" charset="0"/>
+                <a:ea typeface="Georgia" pitchFamily="34" charset="-122"/>
+                <a:cs typeface="Georgia" pitchFamily="34" charset="-120"/>
+              </a:rPr>
+              <a:t>30</a:t>
+            </a:r>
+            <a:endParaRPr lang="en-US" sz="900" dirty="0"/>
+          </a:p>
+        </p:txBody>
+      </p:sp>
+    </p:spTree>
+  </p:cSld>
+  <p:clrMapOvr>
+    <a:masterClrMapping/>
+  </p:clrMapOvr>
+</p:sld>
+</file>
+
+<file path=ppt/slides/slide31.xml><?xml version="1.0" encoding="utf-8"?>
+<p:sld xmlns:a="http://schemas.openxmlformats.org/drawingml/2006/main" xmlns:r="http://schemas.openxmlformats.org/officeDocument/2006/relationships" xmlns:p="http://schemas.openxmlformats.org/presentationml/2006/main">
   <p:cSld name="Slide 30">
     <p:bg>
       <p:bgPr>
@@ -17040,7 +17597,7 @@
                 <a:ea typeface="Georgia" pitchFamily="34" charset="-122"/>
                 <a:cs typeface="Georgia" pitchFamily="34" charset="-120"/>
               </a:rPr>
-              <a:t>30</a:t>
+              <a:t>31</a:t>
             </a:r>
             <a:endParaRPr lang="en-US" sz="900" dirty="0"/>
           </a:p>
@@ -17054,7 +17611,7 @@
 </p:sld>
 </file>
 
-<file path=ppt/slides/slide31.xml><?xml version="1.0" encoding="utf-8"?>
+<file path=ppt/slides/slide32.xml><?xml version="1.0" encoding="utf-8"?>
 <p:sld xmlns:a="http://schemas.openxmlformats.org/drawingml/2006/main" xmlns:r="http://schemas.openxmlformats.org/officeDocument/2006/relationships" xmlns:p="http://schemas.openxmlformats.org/presentationml/2006/main">
   <p:cSld name="Slide 31">
     <p:bg>
@@ -17349,7 +17906,7 @@
                 <a:ea typeface="Georgia" pitchFamily="34" charset="-122"/>
                 <a:cs typeface="Georgia" pitchFamily="34" charset="-120"/>
               </a:rPr>
-              <a:t>31</a:t>
+              <a:t>32</a:t>
             </a:r>
             <a:endParaRPr lang="en-US" sz="900" dirty="0"/>
           </a:p>
@@ -17420,7 +17977,7 @@
                 <a:ea typeface="Georgia" pitchFamily="34" charset="-122"/>
                 <a:cs typeface="Georgia" pitchFamily="34" charset="-120"/>
               </a:rPr>
-              <a:t>THE HABIT THAT RUNS ALL PROGRAMME</a:t>
+              <a:t>WHAT THE DIAGRAM NEVER DREW</a:t>
             </a:r>
             <a:endParaRPr lang="en-US" sz="1150" dirty="0"/>
           </a:p>
@@ -17459,7 +18016,7 @@
                 <a:ea typeface="Georgia" pitchFamily="34" charset="-122"/>
                 <a:cs typeface="Georgia" pitchFamily="34" charset="-120"/>
               </a:rPr>
-              <a:t>Why the crossing is the unit</a:t>
+              <a:t>The layer you are about to automate</a:t>
             </a:r>
             <a:endParaRPr lang="en-US" sz="2450" dirty="0"/>
           </a:p>
@@ -17560,7 +18117,7 @@
                 <a:ea typeface="Georgia" pitchFamily="34" charset="-122"/>
                 <a:cs typeface="Georgia" pitchFamily="34" charset="-120"/>
               </a:rPr>
-              <a:t>Systems fail loudly.   </a:t>
+              <a:t>Between every box, a person.   </a:t>
             </a:r>
             <a:pPr indent="0" marL="0">
               <a:lnSpc>
@@ -17577,7 +18134,7 @@
                 <a:ea typeface="Georgia" pitchFamily="34" charset="-122"/>
                 <a:cs typeface="Georgia" pitchFamily="34" charset="-120"/>
               </a:rPr>
-              <a:t>Alarms, dashboards, owners, budgets. They get fixed because someone is accountable.</a:t>
+              <a:t>The diagram shows systems and integrations; it never drew the people who, at each arrow, carried the meaning, the permission, and the memory no system stored.</a:t>
             </a:r>
             <a:endParaRPr lang="en-US" sz="1450" dirty="0"/>
           </a:p>
@@ -17678,7 +18235,7 @@
                 <a:ea typeface="Georgia" pitchFamily="34" charset="-122"/>
                 <a:cs typeface="Georgia" pitchFamily="34" charset="-120"/>
               </a:rPr>
-              <a:t>Crossings fail silently.   </a:t>
+              <a:t>For decades this worked, and stayed invisible.   </a:t>
             </a:r>
             <a:pPr indent="0" marL="0">
               <a:lnSpc>
@@ -17695,7 +18252,7 @@
                 <a:ea typeface="Georgia" pitchFamily="34" charset="-122"/>
                 <a:cs typeface="Georgia" pitchFamily="34" charset="-120"/>
               </a:rPr>
-              <a:t>No component owns the context; the loss surfaces weeks later as ‘human error’.</a:t>
+              <a:t>The work was salaried, so it never appeared in an architecture diagram or a budget line — and the estate looked adequate because people quietly made up the difference.</a:t>
             </a:r>
             <a:endParaRPr lang="en-US" sz="1450" dirty="0"/>
           </a:p>
@@ -17796,7 +18353,7 @@
                 <a:ea typeface="Georgia" pitchFamily="34" charset="-122"/>
                 <a:cs typeface="Georgia" pitchFamily="34" charset="-120"/>
               </a:rPr>
-              <a:t>The crossing has no name, budget, or owner.   </a:t>
+              <a:t>Agentic AI withdraws that subsidy.   </a:t>
             </a:r>
             <a:pPr indent="0" marL="0">
               <a:lnSpc>
@@ -17813,7 +18370,7 @@
                 <a:ea typeface="Georgia" pitchFamily="34" charset="-122"/>
                 <a:cs typeface="Georgia" pitchFamily="34" charset="-120"/>
               </a:rPr>
-              <a:t>Which is exactly why nobody is funded to fix it — and why you must learn to find it.</a:t>
+              <a:t>Automate a task and the person standing at its boundary leaves with it. What they carried is now carried by nothing, unless the structure was built to carry it.</a:t>
             </a:r>
             <a:endParaRPr lang="en-US" sz="1450" dirty="0"/>
           </a:p>
@@ -17914,7 +18471,7 @@
                 <a:ea typeface="Georgia" pitchFamily="34" charset="-122"/>
                 <a:cs typeface="Georgia" pitchFamily="34" charset="-120"/>
               </a:rPr>
-              <a:t>Your job as a custody architect   </a:t>
+              <a:t>So the failures are not new.   </a:t>
             </a:r>
             <a:pPr indent="0" marL="0">
               <a:lnSpc>
@@ -17931,7 +18488,7 @@
                 <a:ea typeface="Georgia" pitchFamily="34" charset="-122"/>
                 <a:cs typeface="Georgia" pitchFamily="34" charset="-120"/>
               </a:rPr>
-              <a:t>is to make the crossings visible, then ask what survives each one.</a:t>
+              <a:t>They are forty-year-old custody gaps surfacing at once because the compensation that hid them is being removed — which is what you will learn to find.</a:t>
             </a:r>
             <a:endParaRPr lang="en-US" sz="1450" dirty="0"/>
           </a:p>
@@ -18038,6 +18595,680 @@
 </file>
 
 <file path=ppt/slides/slide5.xml><?xml version="1.0" encoding="utf-8"?>
+<p:sld xmlns:a="http://schemas.openxmlformats.org/drawingml/2006/main" xmlns:r="http://schemas.openxmlformats.org/officeDocument/2006/relationships" xmlns:p="http://schemas.openxmlformats.org/presentationml/2006/main">
+  <p:cSld name="Slide 4">
+    <p:bg>
+      <p:bgPr>
+        <a:solidFill>
+          <a:srgbClr val="FFFFFF"/>
+        </a:solidFill>
+      </p:bgPr>
+    </p:bg>
+    <p:spTree>
+      <p:nvGrpSpPr>
+        <p:cNvPr id="1" name=""/>
+        <p:cNvGrpSpPr/>
+        <p:nvPr/>
+      </p:nvGrpSpPr>
+      <p:grpSpPr>
+        <a:xfrm>
+          <a:off x="0" y="0"/>
+          <a:ext cx="0" cy="0"/>
+          <a:chOff x="0" y="0"/>
+          <a:chExt cx="0" cy="0"/>
+        </a:xfrm>
+      </p:grpSpPr>
+      <p:sp>
+        <p:nvSpPr>
+          <p:cNvPr id="2" name="Text 0"/>
+          <p:cNvSpPr/>
+          <p:nvPr/>
+        </p:nvSpPr>
+        <p:spPr>
+          <a:xfrm>
+            <a:off x="566928" y="457200"/>
+            <a:ext cx="11057839" cy="292608"/>
+          </a:xfrm>
+          <a:prstGeom prst="rect">
+            <a:avLst/>
+          </a:prstGeom>
+          <a:noFill/>
+          <a:ln/>
+        </p:spPr>
+        <p:txBody>
+          <a:bodyPr wrap="square" rtlCol="0" anchor="ctr"/>
+          <a:lstStyle/>
+          <a:p>
+            <a:pPr indent="0" marL="0">
+              <a:buNone/>
+            </a:pPr>
+            <a:r>
+              <a:rPr lang="en-US" sz="1050" b="1" spc="100" kern="0" dirty="0">
+                <a:solidFill>
+                  <a:srgbClr val="8A8378"/>
+                </a:solidFill>
+                <a:latin typeface="Georgia" pitchFamily="34" charset="0"/>
+                <a:ea typeface="Georgia" pitchFamily="34" charset="-122"/>
+                <a:cs typeface="Georgia" pitchFamily="34" charset="-120"/>
+              </a:rPr>
+              <a:t>THE HABIT THAT RUNS ALL PROGRAMME</a:t>
+            </a:r>
+            <a:endParaRPr lang="en-US" sz="1150" dirty="0"/>
+          </a:p>
+        </p:txBody>
+      </p:sp>
+      <p:sp>
+        <p:nvSpPr>
+          <p:cNvPr id="3" name="Text 1"/>
+          <p:cNvSpPr/>
+          <p:nvPr/>
+        </p:nvSpPr>
+        <p:spPr>
+          <a:xfrm>
+            <a:off x="566928" y="749808"/>
+            <a:ext cx="11057839" cy="822960"/>
+          </a:xfrm>
+          <a:prstGeom prst="rect">
+            <a:avLst/>
+          </a:prstGeom>
+          <a:noFill/>
+          <a:ln/>
+        </p:spPr>
+        <p:txBody>
+          <a:bodyPr wrap="square" rtlCol="0" anchor="ctr"/>
+          <a:lstStyle/>
+          <a:p>
+            <a:pPr indent="0" marL="0">
+              <a:buNone/>
+            </a:pPr>
+            <a:r>
+              <a:rPr lang="en-US" sz="2450" b="1" dirty="0">
+                <a:solidFill>
+                  <a:srgbClr val="1B1A18"/>
+                </a:solidFill>
+                <a:latin typeface="Georgia" pitchFamily="34" charset="0"/>
+                <a:ea typeface="Georgia" pitchFamily="34" charset="-122"/>
+                <a:cs typeface="Georgia" pitchFamily="34" charset="-120"/>
+              </a:rPr>
+              <a:t>Why the crossing is the unit</a:t>
+            </a:r>
+            <a:endParaRPr lang="en-US" sz="2450" dirty="0"/>
+          </a:p>
+        </p:txBody>
+      </p:sp>
+      <p:sp>
+        <p:nvSpPr>
+          <p:cNvPr id="4" name="Shape 2"/>
+          <p:cNvSpPr/>
+          <p:nvPr/>
+        </p:nvSpPr>
+        <p:spPr>
+          <a:xfrm>
+            <a:off x="566928" y="1691640"/>
+            <a:ext cx="457200" cy="457200"/>
+          </a:xfrm>
+          <a:prstGeom prst="ellipse">
+            <a:avLst/>
+          </a:prstGeom>
+          <a:solidFill>
+            <a:srgbClr val="1B1A18"/>
+          </a:solidFill>
+          <a:ln/>
+        </p:spPr>
+      </p:sp>
+      <p:sp>
+        <p:nvSpPr>
+          <p:cNvPr id="5" name="Text 3"/>
+          <p:cNvSpPr/>
+          <p:nvPr/>
+        </p:nvSpPr>
+        <p:spPr>
+          <a:xfrm>
+            <a:off x="566928" y="1691640"/>
+            <a:ext cx="457200" cy="457200"/>
+          </a:xfrm>
+          <a:prstGeom prst="rect">
+            <a:avLst/>
+          </a:prstGeom>
+          <a:noFill/>
+          <a:ln/>
+        </p:spPr>
+        <p:txBody>
+          <a:bodyPr wrap="square" rtlCol="0" anchor="ctr"/>
+          <a:lstStyle/>
+          <a:p>
+            <a:pPr algn="ctr" indent="0" marL="0">
+              <a:buNone/>
+            </a:pPr>
+            <a:r>
+              <a:rPr lang="en-US" sz="1400" b="1" dirty="0">
+                <a:solidFill>
+                  <a:srgbClr val="FFFFFF"/>
+                </a:solidFill>
+                <a:latin typeface="Georgia" pitchFamily="34" charset="0"/>
+                <a:ea typeface="Georgia" pitchFamily="34" charset="-122"/>
+                <a:cs typeface="Georgia" pitchFamily="34" charset="-120"/>
+              </a:rPr>
+              <a:t>1</a:t>
+            </a:r>
+            <a:endParaRPr lang="en-US" sz="1400" dirty="0"/>
+          </a:p>
+        </p:txBody>
+      </p:sp>
+      <p:sp>
+        <p:nvSpPr>
+          <p:cNvPr id="6" name="Text 4"/>
+          <p:cNvSpPr/>
+          <p:nvPr/>
+        </p:nvSpPr>
+        <p:spPr>
+          <a:xfrm>
+            <a:off x="1234440" y="1636776"/>
+            <a:ext cx="10280599" cy="1056132"/>
+          </a:xfrm>
+          <a:prstGeom prst="rect">
+            <a:avLst/>
+          </a:prstGeom>
+          <a:noFill/>
+          <a:ln/>
+        </p:spPr>
+        <p:txBody>
+          <a:bodyPr wrap="square" rtlCol="0" anchor="t"/>
+          <a:lstStyle/>
+          <a:p>
+            <a:pPr indent="0" marL="0">
+              <a:lnSpc>
+                <a:spcPct val="112000"/>
+              </a:lnSpc>
+              <a:buNone/>
+            </a:pPr>
+            <a:r>
+              <a:rPr lang="en-US" sz="1450" b="1" dirty="0">
+                <a:solidFill>
+                  <a:srgbClr val="33302B"/>
+                </a:solidFill>
+                <a:latin typeface="Georgia" pitchFamily="34" charset="0"/>
+                <a:ea typeface="Georgia" pitchFamily="34" charset="-122"/>
+                <a:cs typeface="Georgia" pitchFamily="34" charset="-120"/>
+              </a:rPr>
+              <a:t>Systems fail loudly.   </a:t>
+            </a:r>
+            <a:pPr indent="0" marL="0">
+              <a:lnSpc>
+                <a:spcPct val="112000"/>
+              </a:lnSpc>
+              <a:buNone/>
+            </a:pPr>
+            <a:r>
+              <a:rPr lang="en-US" sz="1250" dirty="0">
+                <a:solidFill>
+                  <a:srgbClr val="6E6A62"/>
+                </a:solidFill>
+                <a:latin typeface="Georgia" pitchFamily="34" charset="0"/>
+                <a:ea typeface="Georgia" pitchFamily="34" charset="-122"/>
+                <a:cs typeface="Georgia" pitchFamily="34" charset="-120"/>
+              </a:rPr>
+              <a:t>Alarms, dashboards, owners, budgets. They get fixed because someone is accountable.</a:t>
+            </a:r>
+            <a:endParaRPr lang="en-US" sz="1450" dirty="0"/>
+          </a:p>
+        </p:txBody>
+      </p:sp>
+      <p:sp>
+        <p:nvSpPr>
+          <p:cNvPr id="7" name="Shape 5"/>
+          <p:cNvSpPr/>
+          <p:nvPr/>
+        </p:nvSpPr>
+        <p:spPr>
+          <a:xfrm>
+            <a:off x="566928" y="2857500"/>
+            <a:ext cx="457200" cy="457200"/>
+          </a:xfrm>
+          <a:prstGeom prst="ellipse">
+            <a:avLst/>
+          </a:prstGeom>
+          <a:solidFill>
+            <a:srgbClr val="1B1A18"/>
+          </a:solidFill>
+          <a:ln/>
+        </p:spPr>
+      </p:sp>
+      <p:sp>
+        <p:nvSpPr>
+          <p:cNvPr id="8" name="Text 6"/>
+          <p:cNvSpPr/>
+          <p:nvPr/>
+        </p:nvSpPr>
+        <p:spPr>
+          <a:xfrm>
+            <a:off x="566928" y="2857500"/>
+            <a:ext cx="457200" cy="457200"/>
+          </a:xfrm>
+          <a:prstGeom prst="rect">
+            <a:avLst/>
+          </a:prstGeom>
+          <a:noFill/>
+          <a:ln/>
+        </p:spPr>
+        <p:txBody>
+          <a:bodyPr wrap="square" rtlCol="0" anchor="ctr"/>
+          <a:lstStyle/>
+          <a:p>
+            <a:pPr algn="ctr" indent="0" marL="0">
+              <a:buNone/>
+            </a:pPr>
+            <a:r>
+              <a:rPr lang="en-US" sz="1400" b="1" dirty="0">
+                <a:solidFill>
+                  <a:srgbClr val="FFFFFF"/>
+                </a:solidFill>
+                <a:latin typeface="Georgia" pitchFamily="34" charset="0"/>
+                <a:ea typeface="Georgia" pitchFamily="34" charset="-122"/>
+                <a:cs typeface="Georgia" pitchFamily="34" charset="-120"/>
+              </a:rPr>
+              <a:t>2</a:t>
+            </a:r>
+            <a:endParaRPr lang="en-US" sz="1400" dirty="0"/>
+          </a:p>
+        </p:txBody>
+      </p:sp>
+      <p:sp>
+        <p:nvSpPr>
+          <p:cNvPr id="9" name="Text 7"/>
+          <p:cNvSpPr/>
+          <p:nvPr/>
+        </p:nvSpPr>
+        <p:spPr>
+          <a:xfrm>
+            <a:off x="1234440" y="2802636"/>
+            <a:ext cx="10280599" cy="1056132"/>
+          </a:xfrm>
+          <a:prstGeom prst="rect">
+            <a:avLst/>
+          </a:prstGeom>
+          <a:noFill/>
+          <a:ln/>
+        </p:spPr>
+        <p:txBody>
+          <a:bodyPr wrap="square" rtlCol="0" anchor="t"/>
+          <a:lstStyle/>
+          <a:p>
+            <a:pPr indent="0" marL="0">
+              <a:lnSpc>
+                <a:spcPct val="112000"/>
+              </a:lnSpc>
+              <a:buNone/>
+            </a:pPr>
+            <a:r>
+              <a:rPr lang="en-US" sz="1450" b="1" dirty="0">
+                <a:solidFill>
+                  <a:srgbClr val="33302B"/>
+                </a:solidFill>
+                <a:latin typeface="Georgia" pitchFamily="34" charset="0"/>
+                <a:ea typeface="Georgia" pitchFamily="34" charset="-122"/>
+                <a:cs typeface="Georgia" pitchFamily="34" charset="-120"/>
+              </a:rPr>
+              <a:t>Crossings fail silently.   </a:t>
+            </a:r>
+            <a:pPr indent="0" marL="0">
+              <a:lnSpc>
+                <a:spcPct val="112000"/>
+              </a:lnSpc>
+              <a:buNone/>
+            </a:pPr>
+            <a:r>
+              <a:rPr lang="en-US" sz="1250" dirty="0">
+                <a:solidFill>
+                  <a:srgbClr val="6E6A62"/>
+                </a:solidFill>
+                <a:latin typeface="Georgia" pitchFamily="34" charset="0"/>
+                <a:ea typeface="Georgia" pitchFamily="34" charset="-122"/>
+                <a:cs typeface="Georgia" pitchFamily="34" charset="-120"/>
+              </a:rPr>
+              <a:t>No component owns the context; the loss surfaces weeks later as ‘human error’.</a:t>
+            </a:r>
+            <a:endParaRPr lang="en-US" sz="1450" dirty="0"/>
+          </a:p>
+        </p:txBody>
+      </p:sp>
+      <p:sp>
+        <p:nvSpPr>
+          <p:cNvPr id="10" name="Shape 8"/>
+          <p:cNvSpPr/>
+          <p:nvPr/>
+        </p:nvSpPr>
+        <p:spPr>
+          <a:xfrm>
+            <a:off x="566928" y="4023360"/>
+            <a:ext cx="457200" cy="457200"/>
+          </a:xfrm>
+          <a:prstGeom prst="ellipse">
+            <a:avLst/>
+          </a:prstGeom>
+          <a:solidFill>
+            <a:srgbClr val="1B1A18"/>
+          </a:solidFill>
+          <a:ln/>
+        </p:spPr>
+      </p:sp>
+      <p:sp>
+        <p:nvSpPr>
+          <p:cNvPr id="11" name="Text 9"/>
+          <p:cNvSpPr/>
+          <p:nvPr/>
+        </p:nvSpPr>
+        <p:spPr>
+          <a:xfrm>
+            <a:off x="566928" y="4023360"/>
+            <a:ext cx="457200" cy="457200"/>
+          </a:xfrm>
+          <a:prstGeom prst="rect">
+            <a:avLst/>
+          </a:prstGeom>
+          <a:noFill/>
+          <a:ln/>
+        </p:spPr>
+        <p:txBody>
+          <a:bodyPr wrap="square" rtlCol="0" anchor="ctr"/>
+          <a:lstStyle/>
+          <a:p>
+            <a:pPr algn="ctr" indent="0" marL="0">
+              <a:buNone/>
+            </a:pPr>
+            <a:r>
+              <a:rPr lang="en-US" sz="1400" b="1" dirty="0">
+                <a:solidFill>
+                  <a:srgbClr val="FFFFFF"/>
+                </a:solidFill>
+                <a:latin typeface="Georgia" pitchFamily="34" charset="0"/>
+                <a:ea typeface="Georgia" pitchFamily="34" charset="-122"/>
+                <a:cs typeface="Georgia" pitchFamily="34" charset="-120"/>
+              </a:rPr>
+              <a:t>3</a:t>
+            </a:r>
+            <a:endParaRPr lang="en-US" sz="1400" dirty="0"/>
+          </a:p>
+        </p:txBody>
+      </p:sp>
+      <p:sp>
+        <p:nvSpPr>
+          <p:cNvPr id="12" name="Text 10"/>
+          <p:cNvSpPr/>
+          <p:nvPr/>
+        </p:nvSpPr>
+        <p:spPr>
+          <a:xfrm>
+            <a:off x="1234440" y="3968496"/>
+            <a:ext cx="10280599" cy="1056132"/>
+          </a:xfrm>
+          <a:prstGeom prst="rect">
+            <a:avLst/>
+          </a:prstGeom>
+          <a:noFill/>
+          <a:ln/>
+        </p:spPr>
+        <p:txBody>
+          <a:bodyPr wrap="square" rtlCol="0" anchor="t"/>
+          <a:lstStyle/>
+          <a:p>
+            <a:pPr indent="0" marL="0">
+              <a:lnSpc>
+                <a:spcPct val="112000"/>
+              </a:lnSpc>
+              <a:buNone/>
+            </a:pPr>
+            <a:r>
+              <a:rPr lang="en-US" sz="1450" b="1" dirty="0">
+                <a:solidFill>
+                  <a:srgbClr val="33302B"/>
+                </a:solidFill>
+                <a:latin typeface="Georgia" pitchFamily="34" charset="0"/>
+                <a:ea typeface="Georgia" pitchFamily="34" charset="-122"/>
+                <a:cs typeface="Georgia" pitchFamily="34" charset="-120"/>
+              </a:rPr>
+              <a:t>The crossing has no name, budget, or owner.   </a:t>
+            </a:r>
+            <a:pPr indent="0" marL="0">
+              <a:lnSpc>
+                <a:spcPct val="112000"/>
+              </a:lnSpc>
+              <a:buNone/>
+            </a:pPr>
+            <a:r>
+              <a:rPr lang="en-US" sz="1250" dirty="0">
+                <a:solidFill>
+                  <a:srgbClr val="6E6A62"/>
+                </a:solidFill>
+                <a:latin typeface="Georgia" pitchFamily="34" charset="0"/>
+                <a:ea typeface="Georgia" pitchFamily="34" charset="-122"/>
+                <a:cs typeface="Georgia" pitchFamily="34" charset="-120"/>
+              </a:rPr>
+              <a:t>Which is exactly why nobody is funded to fix it — and why you must learn to find it.</a:t>
+            </a:r>
+            <a:endParaRPr lang="en-US" sz="1450" dirty="0"/>
+          </a:p>
+        </p:txBody>
+      </p:sp>
+      <p:sp>
+        <p:nvSpPr>
+          <p:cNvPr id="13" name="Shape 11"/>
+          <p:cNvSpPr/>
+          <p:nvPr/>
+        </p:nvSpPr>
+        <p:spPr>
+          <a:xfrm>
+            <a:off x="566928" y="5189220"/>
+            <a:ext cx="457200" cy="457200"/>
+          </a:xfrm>
+          <a:prstGeom prst="ellipse">
+            <a:avLst/>
+          </a:prstGeom>
+          <a:solidFill>
+            <a:srgbClr val="1B1A18"/>
+          </a:solidFill>
+          <a:ln/>
+        </p:spPr>
+      </p:sp>
+      <p:sp>
+        <p:nvSpPr>
+          <p:cNvPr id="14" name="Text 12"/>
+          <p:cNvSpPr/>
+          <p:nvPr/>
+        </p:nvSpPr>
+        <p:spPr>
+          <a:xfrm>
+            <a:off x="566928" y="5189220"/>
+            <a:ext cx="457200" cy="457200"/>
+          </a:xfrm>
+          <a:prstGeom prst="rect">
+            <a:avLst/>
+          </a:prstGeom>
+          <a:noFill/>
+          <a:ln/>
+        </p:spPr>
+        <p:txBody>
+          <a:bodyPr wrap="square" rtlCol="0" anchor="ctr"/>
+          <a:lstStyle/>
+          <a:p>
+            <a:pPr algn="ctr" indent="0" marL="0">
+              <a:buNone/>
+            </a:pPr>
+            <a:r>
+              <a:rPr lang="en-US" sz="1400" b="1" dirty="0">
+                <a:solidFill>
+                  <a:srgbClr val="FFFFFF"/>
+                </a:solidFill>
+                <a:latin typeface="Georgia" pitchFamily="34" charset="0"/>
+                <a:ea typeface="Georgia" pitchFamily="34" charset="-122"/>
+                <a:cs typeface="Georgia" pitchFamily="34" charset="-120"/>
+              </a:rPr>
+              <a:t>4</a:t>
+            </a:r>
+            <a:endParaRPr lang="en-US" sz="1400" dirty="0"/>
+          </a:p>
+        </p:txBody>
+      </p:sp>
+      <p:sp>
+        <p:nvSpPr>
+          <p:cNvPr id="15" name="Text 13"/>
+          <p:cNvSpPr/>
+          <p:nvPr/>
+        </p:nvSpPr>
+        <p:spPr>
+          <a:xfrm>
+            <a:off x="1234440" y="5134356"/>
+            <a:ext cx="10280599" cy="1056132"/>
+          </a:xfrm>
+          <a:prstGeom prst="rect">
+            <a:avLst/>
+          </a:prstGeom>
+          <a:noFill/>
+          <a:ln/>
+        </p:spPr>
+        <p:txBody>
+          <a:bodyPr wrap="square" rtlCol="0" anchor="t"/>
+          <a:lstStyle/>
+          <a:p>
+            <a:pPr indent="0" marL="0">
+              <a:lnSpc>
+                <a:spcPct val="112000"/>
+              </a:lnSpc>
+              <a:buNone/>
+            </a:pPr>
+            <a:r>
+              <a:rPr lang="en-US" sz="1450" b="1" dirty="0">
+                <a:solidFill>
+                  <a:srgbClr val="33302B"/>
+                </a:solidFill>
+                <a:latin typeface="Georgia" pitchFamily="34" charset="0"/>
+                <a:ea typeface="Georgia" pitchFamily="34" charset="-122"/>
+                <a:cs typeface="Georgia" pitchFamily="34" charset="-120"/>
+              </a:rPr>
+              <a:t>Your job as a custody architect   </a:t>
+            </a:r>
+            <a:pPr indent="0" marL="0">
+              <a:lnSpc>
+                <a:spcPct val="112000"/>
+              </a:lnSpc>
+              <a:buNone/>
+            </a:pPr>
+            <a:r>
+              <a:rPr lang="en-US" sz="1250" dirty="0">
+                <a:solidFill>
+                  <a:srgbClr val="6E6A62"/>
+                </a:solidFill>
+                <a:latin typeface="Georgia" pitchFamily="34" charset="0"/>
+                <a:ea typeface="Georgia" pitchFamily="34" charset="-122"/>
+                <a:cs typeface="Georgia" pitchFamily="34" charset="-120"/>
+              </a:rPr>
+              <a:t>is to make the crossings visible, then ask what survives each one.</a:t>
+            </a:r>
+            <a:endParaRPr lang="en-US" sz="1450" dirty="0"/>
+          </a:p>
+        </p:txBody>
+      </p:sp>
+      <p:sp>
+        <p:nvSpPr>
+          <p:cNvPr id="16" name="Text 14"/>
+          <p:cNvSpPr/>
+          <p:nvPr/>
+        </p:nvSpPr>
+        <p:spPr>
+          <a:xfrm>
+            <a:off x="566928" y="6473952"/>
+            <a:ext cx="9960559" cy="274320"/>
+          </a:xfrm>
+          <a:prstGeom prst="rect">
+            <a:avLst/>
+          </a:prstGeom>
+          <a:noFill/>
+          <a:ln/>
+        </p:spPr>
+        <p:txBody>
+          <a:bodyPr wrap="square" rtlCol="0" anchor="ctr"/>
+          <a:lstStyle/>
+          <a:p>
+            <a:pPr algn="l" indent="0" marL="0">
+              <a:buNone/>
+            </a:pPr>
+            <a:r>
+              <a:rPr lang="en-US" sz="900" i="1" dirty="0">
+                <a:solidFill>
+                  <a:srgbClr val="6E6A62"/>
+                </a:solidFill>
+                <a:latin typeface="Georgia" pitchFamily="34" charset="0"/>
+                <a:ea typeface="Georgia" pitchFamily="34" charset="-122"/>
+                <a:cs typeface="Georgia" pitchFamily="34" charset="-120"/>
+              </a:rPr>
+              <a:t>What the Structure Does Not Carry</a:t>
+            </a:r>
+            <a:pPr algn="l" indent="0" marL="0">
+              <a:buNone/>
+            </a:pPr>
+            <a:r>
+              <a:rPr lang="en-US" sz="900" dirty="0">
+                <a:solidFill>
+                  <a:srgbClr val="6E6A62"/>
+                </a:solidFill>
+                <a:latin typeface="Georgia" pitchFamily="34" charset="0"/>
+                <a:ea typeface="Georgia" pitchFamily="34" charset="-122"/>
+                <a:cs typeface="Georgia" pitchFamily="34" charset="-120"/>
+              </a:rPr>
+              <a:t>  ·  Professional Certificate — The Custody Architect</a:t>
+            </a:r>
+            <a:endParaRPr lang="en-US" sz="900" dirty="0"/>
+          </a:p>
+        </p:txBody>
+      </p:sp>
+      <p:sp>
+        <p:nvSpPr>
+          <p:cNvPr id="17" name="Text 15"/>
+          <p:cNvSpPr/>
+          <p:nvPr/>
+        </p:nvSpPr>
+        <p:spPr>
+          <a:xfrm>
+            <a:off x="10710367" y="6473952"/>
+            <a:ext cx="914400" cy="274320"/>
+          </a:xfrm>
+          <a:prstGeom prst="rect">
+            <a:avLst/>
+          </a:prstGeom>
+          <a:noFill/>
+          <a:ln/>
+        </p:spPr>
+        <p:txBody>
+          <a:bodyPr wrap="square" rtlCol="0" anchor="ctr"/>
+          <a:lstStyle/>
+          <a:p>
+            <a:pPr algn="r" indent="0" marL="0">
+              <a:buNone/>
+            </a:pPr>
+            <a:r>
+              <a:rPr lang="en-US" sz="900" dirty="0">
+                <a:solidFill>
+                  <a:srgbClr val="6E6A62"/>
+                </a:solidFill>
+                <a:latin typeface="Georgia" pitchFamily="34" charset="0"/>
+                <a:ea typeface="Georgia" pitchFamily="34" charset="-122"/>
+                <a:cs typeface="Georgia" pitchFamily="34" charset="-120"/>
+              </a:rPr>
+              <a:t>5</a:t>
+            </a:r>
+            <a:endParaRPr lang="en-US" sz="900" dirty="0"/>
+          </a:p>
+        </p:txBody>
+      </p:sp>
+    </p:spTree>
+  </p:cSld>
+  <p:clrMapOvr>
+    <a:masterClrMapping/>
+  </p:clrMapOvr>
+</p:sld>
+</file>
+
+<file path=ppt/slides/slide6.xml><?xml version="1.0" encoding="utf-8"?>
 <p:sld xmlns:a="http://schemas.openxmlformats.org/drawingml/2006/main" xmlns:r="http://schemas.openxmlformats.org/officeDocument/2006/relationships" xmlns:p="http://schemas.openxmlformats.org/presentationml/2006/main">
   <p:cSld name="Slide 5">
     <p:bg>
@@ -18306,7 +19537,7 @@
                 <a:ea typeface="Georgia" pitchFamily="34" charset="-122"/>
                 <a:cs typeface="Georgia" pitchFamily="34" charset="-120"/>
               </a:rPr>
-              <a:t>5</a:t>
+              <a:t>6</a:t>
             </a:r>
             <a:endParaRPr lang="en-US" sz="900" dirty="0"/>
           </a:p>
@@ -18320,7 +19551,7 @@
 </p:sld>
 </file>
 
-<file path=ppt/slides/slide6.xml><?xml version="1.0" encoding="utf-8"?>
+<file path=ppt/slides/slide7.xml><?xml version="1.0" encoding="utf-8"?>
 <p:sld xmlns:a="http://schemas.openxmlformats.org/drawingml/2006/main" xmlns:r="http://schemas.openxmlformats.org/officeDocument/2006/relationships" xmlns:p="http://schemas.openxmlformats.org/presentationml/2006/main">
   <p:cSld name="Slide 6">
     <p:bg>
@@ -18833,7 +20064,7 @@
                 <a:ea typeface="Georgia" pitchFamily="34" charset="-122"/>
                 <a:cs typeface="Georgia" pitchFamily="34" charset="-120"/>
               </a:rPr>
-              <a:t>6</a:t>
+              <a:t>7</a:t>
             </a:r>
             <a:endParaRPr lang="en-US" sz="900" dirty="0"/>
           </a:p>
@@ -18847,7 +20078,7 @@
 </p:sld>
 </file>
 
-<file path=ppt/slides/slide7.xml><?xml version="1.0" encoding="utf-8"?>
+<file path=ppt/slides/slide8.xml><?xml version="1.0" encoding="utf-8"?>
 <p:sld xmlns:a="http://schemas.openxmlformats.org/drawingml/2006/main" xmlns:r="http://schemas.openxmlformats.org/officeDocument/2006/relationships" xmlns:p="http://schemas.openxmlformats.org/presentationml/2006/main">
   <p:cSld name="Slide 7">
     <p:bg>
@@ -19339,7 +20570,7 @@
                 <a:ea typeface="Georgia" pitchFamily="34" charset="-122"/>
                 <a:cs typeface="Georgia" pitchFamily="34" charset="-120"/>
               </a:rPr>
-              <a:t>7</a:t>
+              <a:t>8</a:t>
             </a:r>
             <a:endParaRPr lang="en-US" sz="900" dirty="0"/>
           </a:p>
@@ -19353,7 +20584,7 @@
 </p:sld>
 </file>
 
-<file path=ppt/slides/slide8.xml><?xml version="1.0" encoding="utf-8"?>
+<file path=ppt/slides/slide9.xml><?xml version="1.0" encoding="utf-8"?>
 <p:sld xmlns:a="http://schemas.openxmlformats.org/drawingml/2006/main" xmlns:r="http://schemas.openxmlformats.org/officeDocument/2006/relationships" xmlns:p="http://schemas.openxmlformats.org/presentationml/2006/main">
   <p:cSld name="Slide 8">
     <p:bg>
@@ -20525,562 +21756,6 @@
       <p:sp>
         <p:nvSpPr>
           <p:cNvPr id="35" name="Text 33"/>
-          <p:cNvSpPr/>
-          <p:nvPr/>
-        </p:nvSpPr>
-        <p:spPr>
-          <a:xfrm>
-            <a:off x="10710367" y="6473952"/>
-            <a:ext cx="914400" cy="274320"/>
-          </a:xfrm>
-          <a:prstGeom prst="rect">
-            <a:avLst/>
-          </a:prstGeom>
-          <a:noFill/>
-          <a:ln/>
-        </p:spPr>
-        <p:txBody>
-          <a:bodyPr wrap="square" rtlCol="0" anchor="ctr"/>
-          <a:lstStyle/>
-          <a:p>
-            <a:pPr algn="r" indent="0" marL="0">
-              <a:buNone/>
-            </a:pPr>
-            <a:r>
-              <a:rPr lang="en-US" sz="900" dirty="0">
-                <a:solidFill>
-                  <a:srgbClr val="6E6A62"/>
-                </a:solidFill>
-                <a:latin typeface="Georgia" pitchFamily="34" charset="0"/>
-                <a:ea typeface="Georgia" pitchFamily="34" charset="-122"/>
-                <a:cs typeface="Georgia" pitchFamily="34" charset="-120"/>
-              </a:rPr>
-              <a:t>8</a:t>
-            </a:r>
-            <a:endParaRPr lang="en-US" sz="900" dirty="0"/>
-          </a:p>
-        </p:txBody>
-      </p:sp>
-    </p:spTree>
-  </p:cSld>
-  <p:clrMapOvr>
-    <a:masterClrMapping/>
-  </p:clrMapOvr>
-</p:sld>
-</file>
-
-<file path=ppt/slides/slide9.xml><?xml version="1.0" encoding="utf-8"?>
-<p:sld xmlns:a="http://schemas.openxmlformats.org/drawingml/2006/main" xmlns:r="http://schemas.openxmlformats.org/officeDocument/2006/relationships" xmlns:p="http://schemas.openxmlformats.org/presentationml/2006/main">
-  <p:cSld name="Slide 9">
-    <p:bg>
-      <p:bgPr>
-        <a:solidFill>
-          <a:srgbClr val="FFFFFF"/>
-        </a:solidFill>
-      </p:bgPr>
-    </p:bg>
-    <p:spTree>
-      <p:nvGrpSpPr>
-        <p:cNvPr id="1" name=""/>
-        <p:cNvGrpSpPr/>
-        <p:nvPr/>
-      </p:nvGrpSpPr>
-      <p:grpSpPr>
-        <a:xfrm>
-          <a:off x="0" y="0"/>
-          <a:ext cx="0" cy="0"/>
-          <a:chOff x="0" y="0"/>
-          <a:chExt cx="0" cy="0"/>
-        </a:xfrm>
-      </p:grpSpPr>
-      <p:sp>
-        <p:nvSpPr>
-          <p:cNvPr id="2" name="Text 0"/>
-          <p:cNvSpPr/>
-          <p:nvPr/>
-        </p:nvSpPr>
-        <p:spPr>
-          <a:xfrm>
-            <a:off x="566928" y="457200"/>
-            <a:ext cx="11057839" cy="292608"/>
-          </a:xfrm>
-          <a:prstGeom prst="rect">
-            <a:avLst/>
-          </a:prstGeom>
-          <a:noFill/>
-          <a:ln/>
-        </p:spPr>
-        <p:txBody>
-          <a:bodyPr wrap="square" rtlCol="0" anchor="ctr"/>
-          <a:lstStyle/>
-          <a:p>
-            <a:pPr indent="0" marL="0">
-              <a:buNone/>
-            </a:pPr>
-            <a:r>
-              <a:rPr lang="en-US" sz="1050" b="1" spc="100" kern="0" dirty="0">
-                <a:solidFill>
-                  <a:srgbClr val="8A8378"/>
-                </a:solidFill>
-                <a:latin typeface="Georgia" pitchFamily="34" charset="0"/>
-                <a:ea typeface="Georgia" pitchFamily="34" charset="-122"/>
-                <a:cs typeface="Georgia" pitchFamily="34" charset="-120"/>
-              </a:rPr>
-              <a:t>THE CUSTODY ARCHITECT’S CLINICAL METHOD</a:t>
-            </a:r>
-            <a:endParaRPr lang="en-US" sz="1150" dirty="0"/>
-          </a:p>
-        </p:txBody>
-      </p:sp>
-      <p:sp>
-        <p:nvSpPr>
-          <p:cNvPr id="3" name="Text 1"/>
-          <p:cNvSpPr/>
-          <p:nvPr/>
-        </p:nvSpPr>
-        <p:spPr>
-          <a:xfrm>
-            <a:off x="566928" y="749808"/>
-            <a:ext cx="11057839" cy="822960"/>
-          </a:xfrm>
-          <a:prstGeom prst="rect">
-            <a:avLst/>
-          </a:prstGeom>
-          <a:noFill/>
-          <a:ln/>
-        </p:spPr>
-        <p:txBody>
-          <a:bodyPr wrap="square" rtlCol="0" anchor="ctr"/>
-          <a:lstStyle/>
-          <a:p>
-            <a:pPr indent="0" marL="0">
-              <a:buNone/>
-            </a:pPr>
-            <a:r>
-              <a:rPr lang="en-US" sz="2450" b="1" dirty="0">
-                <a:solidFill>
-                  <a:srgbClr val="1B1A18"/>
-                </a:solidFill>
-                <a:latin typeface="Georgia" pitchFamily="34" charset="0"/>
-                <a:ea typeface="Georgia" pitchFamily="34" charset="-122"/>
-                <a:cs typeface="Georgia" pitchFamily="34" charset="-120"/>
-              </a:rPr>
-              <a:t>Diagnose by damage</a:t>
-            </a:r>
-            <a:endParaRPr lang="en-US" sz="2450" dirty="0"/>
-          </a:p>
-        </p:txBody>
-      </p:sp>
-      <p:sp>
-        <p:nvSpPr>
-          <p:cNvPr id="4" name="Shape 2"/>
-          <p:cNvSpPr/>
-          <p:nvPr/>
-        </p:nvSpPr>
-        <p:spPr>
-          <a:xfrm>
-            <a:off x="566928" y="1691640"/>
-            <a:ext cx="457200" cy="457200"/>
-          </a:xfrm>
-          <a:prstGeom prst="ellipse">
-            <a:avLst/>
-          </a:prstGeom>
-          <a:solidFill>
-            <a:srgbClr val="8A8378"/>
-          </a:solidFill>
-          <a:ln/>
-        </p:spPr>
-      </p:sp>
-      <p:sp>
-        <p:nvSpPr>
-          <p:cNvPr id="5" name="Text 3"/>
-          <p:cNvSpPr/>
-          <p:nvPr/>
-        </p:nvSpPr>
-        <p:spPr>
-          <a:xfrm>
-            <a:off x="566928" y="1691640"/>
-            <a:ext cx="457200" cy="457200"/>
-          </a:xfrm>
-          <a:prstGeom prst="rect">
-            <a:avLst/>
-          </a:prstGeom>
-          <a:noFill/>
-          <a:ln/>
-        </p:spPr>
-        <p:txBody>
-          <a:bodyPr wrap="square" rtlCol="0" anchor="ctr"/>
-          <a:lstStyle/>
-          <a:p>
-            <a:pPr algn="ctr" indent="0" marL="0">
-              <a:buNone/>
-            </a:pPr>
-            <a:r>
-              <a:rPr lang="en-US" sz="1400" b="1" dirty="0">
-                <a:solidFill>
-                  <a:srgbClr val="FFFFFF"/>
-                </a:solidFill>
-                <a:latin typeface="Georgia" pitchFamily="34" charset="0"/>
-                <a:ea typeface="Georgia" pitchFamily="34" charset="-122"/>
-                <a:cs typeface="Georgia" pitchFamily="34" charset="-120"/>
-              </a:rPr>
-              <a:t>1</a:t>
-            </a:r>
-            <a:endParaRPr lang="en-US" sz="1400" dirty="0"/>
-          </a:p>
-        </p:txBody>
-      </p:sp>
-      <p:sp>
-        <p:nvSpPr>
-          <p:cNvPr id="6" name="Text 4"/>
-          <p:cNvSpPr/>
-          <p:nvPr/>
-        </p:nvSpPr>
-        <p:spPr>
-          <a:xfrm>
-            <a:off x="1234440" y="1636776"/>
-            <a:ext cx="10280599" cy="1444752"/>
-          </a:xfrm>
-          <a:prstGeom prst="rect">
-            <a:avLst/>
-          </a:prstGeom>
-          <a:noFill/>
-          <a:ln/>
-        </p:spPr>
-        <p:txBody>
-          <a:bodyPr wrap="square" rtlCol="0" anchor="t"/>
-          <a:lstStyle/>
-          <a:p>
-            <a:pPr indent="0" marL="0">
-              <a:lnSpc>
-                <a:spcPct val="112000"/>
-              </a:lnSpc>
-              <a:buNone/>
-            </a:pPr>
-            <a:r>
-              <a:rPr lang="en-US" sz="1450" b="1" dirty="0">
-                <a:solidFill>
-                  <a:srgbClr val="33302B"/>
-                </a:solidFill>
-                <a:latin typeface="Georgia" pitchFamily="34" charset="0"/>
-                <a:ea typeface="Georgia" pitchFamily="34" charset="-122"/>
-                <a:cs typeface="Georgia" pitchFamily="34" charset="-120"/>
-              </a:rPr>
-              <a:t>Start from the symptom, not the cause you assume.   </a:t>
-            </a:r>
-            <a:pPr indent="0" marL="0">
-              <a:lnSpc>
-                <a:spcPct val="112000"/>
-              </a:lnSpc>
-              <a:buNone/>
-            </a:pPr>
-            <a:r>
-              <a:rPr lang="en-US" sz="1250" dirty="0">
-                <a:solidFill>
-                  <a:srgbClr val="6E6A62"/>
-                </a:solidFill>
-                <a:latin typeface="Georgia" pitchFamily="34" charset="0"/>
-                <a:ea typeface="Georgia" pitchFamily="34" charset="-122"/>
-                <a:cs typeface="Georgia" pitchFamily="34" charset="-120"/>
-              </a:rPr>
-              <a:t>‘A number meant the wrong thing’ → context, before you blame a person.</a:t>
-            </a:r>
-            <a:endParaRPr lang="en-US" sz="1450" dirty="0"/>
-          </a:p>
-        </p:txBody>
-      </p:sp>
-      <p:sp>
-        <p:nvSpPr>
-          <p:cNvPr id="7" name="Shape 5"/>
-          <p:cNvSpPr/>
-          <p:nvPr/>
-        </p:nvSpPr>
-        <p:spPr>
-          <a:xfrm>
-            <a:off x="566928" y="3246120"/>
-            <a:ext cx="457200" cy="457200"/>
-          </a:xfrm>
-          <a:prstGeom prst="ellipse">
-            <a:avLst/>
-          </a:prstGeom>
-          <a:solidFill>
-            <a:srgbClr val="8A8378"/>
-          </a:solidFill>
-          <a:ln/>
-        </p:spPr>
-      </p:sp>
-      <p:sp>
-        <p:nvSpPr>
-          <p:cNvPr id="8" name="Text 6"/>
-          <p:cNvSpPr/>
-          <p:nvPr/>
-        </p:nvSpPr>
-        <p:spPr>
-          <a:xfrm>
-            <a:off x="566928" y="3246120"/>
-            <a:ext cx="457200" cy="457200"/>
-          </a:xfrm>
-          <a:prstGeom prst="rect">
-            <a:avLst/>
-          </a:prstGeom>
-          <a:noFill/>
-          <a:ln/>
-        </p:spPr>
-        <p:txBody>
-          <a:bodyPr wrap="square" rtlCol="0" anchor="ctr"/>
-          <a:lstStyle/>
-          <a:p>
-            <a:pPr algn="ctr" indent="0" marL="0">
-              <a:buNone/>
-            </a:pPr>
-            <a:r>
-              <a:rPr lang="en-US" sz="1400" b="1" dirty="0">
-                <a:solidFill>
-                  <a:srgbClr val="FFFFFF"/>
-                </a:solidFill>
-                <a:latin typeface="Georgia" pitchFamily="34" charset="0"/>
-                <a:ea typeface="Georgia" pitchFamily="34" charset="-122"/>
-                <a:cs typeface="Georgia" pitchFamily="34" charset="-120"/>
-              </a:rPr>
-              <a:t>2</a:t>
-            </a:r>
-            <a:endParaRPr lang="en-US" sz="1400" dirty="0"/>
-          </a:p>
-        </p:txBody>
-      </p:sp>
-      <p:sp>
-        <p:nvSpPr>
-          <p:cNvPr id="9" name="Text 7"/>
-          <p:cNvSpPr/>
-          <p:nvPr/>
-        </p:nvSpPr>
-        <p:spPr>
-          <a:xfrm>
-            <a:off x="1234440" y="3191256"/>
-            <a:ext cx="10280599" cy="1444752"/>
-          </a:xfrm>
-          <a:prstGeom prst="rect">
-            <a:avLst/>
-          </a:prstGeom>
-          <a:noFill/>
-          <a:ln/>
-        </p:spPr>
-        <p:txBody>
-          <a:bodyPr wrap="square" rtlCol="0" anchor="t"/>
-          <a:lstStyle/>
-          <a:p>
-            <a:pPr indent="0" marL="0">
-              <a:lnSpc>
-                <a:spcPct val="112000"/>
-              </a:lnSpc>
-              <a:buNone/>
-            </a:pPr>
-            <a:r>
-              <a:rPr lang="en-US" sz="1450" b="1" dirty="0">
-                <a:solidFill>
-                  <a:srgbClr val="33302B"/>
-                </a:solidFill>
-                <a:latin typeface="Georgia" pitchFamily="34" charset="0"/>
-                <a:ea typeface="Georgia" pitchFamily="34" charset="-122"/>
-                <a:cs typeface="Georgia" pitchFamily="34" charset="-120"/>
-              </a:rPr>
-              <a:t>Name the crossing.   </a:t>
-            </a:r>
-            <a:pPr indent="0" marL="0">
-              <a:lnSpc>
-                <a:spcPct val="112000"/>
-              </a:lnSpc>
-              <a:buNone/>
-            </a:pPr>
-            <a:r>
-              <a:rPr lang="en-US" sz="1250" dirty="0">
-                <a:solidFill>
-                  <a:srgbClr val="6E6A62"/>
-                </a:solidFill>
-                <a:latin typeface="Georgia" pitchFamily="34" charset="0"/>
-                <a:ea typeface="Georgia" pitchFamily="34" charset="-122"/>
-                <a:cs typeface="Georgia" pitchFamily="34" charset="-120"/>
-              </a:rPr>
-              <a:t>Every missing property has a boundary where it should have been carried and wasn’t.</a:t>
-            </a:r>
-            <a:endParaRPr lang="en-US" sz="1450" dirty="0"/>
-          </a:p>
-        </p:txBody>
-      </p:sp>
-      <p:sp>
-        <p:nvSpPr>
-          <p:cNvPr id="10" name="Shape 8"/>
-          <p:cNvSpPr/>
-          <p:nvPr/>
-        </p:nvSpPr>
-        <p:spPr>
-          <a:xfrm>
-            <a:off x="566928" y="4800600"/>
-            <a:ext cx="457200" cy="457200"/>
-          </a:xfrm>
-          <a:prstGeom prst="ellipse">
-            <a:avLst/>
-          </a:prstGeom>
-          <a:solidFill>
-            <a:srgbClr val="8A8378"/>
-          </a:solidFill>
-          <a:ln/>
-        </p:spPr>
-      </p:sp>
-      <p:sp>
-        <p:nvSpPr>
-          <p:cNvPr id="11" name="Text 9"/>
-          <p:cNvSpPr/>
-          <p:nvPr/>
-        </p:nvSpPr>
-        <p:spPr>
-          <a:xfrm>
-            <a:off x="566928" y="4800600"/>
-            <a:ext cx="457200" cy="457200"/>
-          </a:xfrm>
-          <a:prstGeom prst="rect">
-            <a:avLst/>
-          </a:prstGeom>
-          <a:noFill/>
-          <a:ln/>
-        </p:spPr>
-        <p:txBody>
-          <a:bodyPr wrap="square" rtlCol="0" anchor="ctr"/>
-          <a:lstStyle/>
-          <a:p>
-            <a:pPr algn="ctr" indent="0" marL="0">
-              <a:buNone/>
-            </a:pPr>
-            <a:r>
-              <a:rPr lang="en-US" sz="1400" b="1" dirty="0">
-                <a:solidFill>
-                  <a:srgbClr val="FFFFFF"/>
-                </a:solidFill>
-                <a:latin typeface="Georgia" pitchFamily="34" charset="0"/>
-                <a:ea typeface="Georgia" pitchFamily="34" charset="-122"/>
-                <a:cs typeface="Georgia" pitchFamily="34" charset="-120"/>
-              </a:rPr>
-              <a:t>3</a:t>
-            </a:r>
-            <a:endParaRPr lang="en-US" sz="1400" dirty="0"/>
-          </a:p>
-        </p:txBody>
-      </p:sp>
-      <p:sp>
-        <p:nvSpPr>
-          <p:cNvPr id="12" name="Text 10"/>
-          <p:cNvSpPr/>
-          <p:nvPr/>
-        </p:nvSpPr>
-        <p:spPr>
-          <a:xfrm>
-            <a:off x="1234440" y="4745736"/>
-            <a:ext cx="10280599" cy="1444752"/>
-          </a:xfrm>
-          <a:prstGeom prst="rect">
-            <a:avLst/>
-          </a:prstGeom>
-          <a:noFill/>
-          <a:ln/>
-        </p:spPr>
-        <p:txBody>
-          <a:bodyPr wrap="square" rtlCol="0" anchor="t"/>
-          <a:lstStyle/>
-          <a:p>
-            <a:pPr indent="0" marL="0">
-              <a:lnSpc>
-                <a:spcPct val="112000"/>
-              </a:lnSpc>
-              <a:buNone/>
-            </a:pPr>
-            <a:r>
-              <a:rPr lang="en-US" sz="1450" b="1" dirty="0">
-                <a:solidFill>
-                  <a:srgbClr val="33302B"/>
-                </a:solidFill>
-                <a:latin typeface="Georgia" pitchFamily="34" charset="0"/>
-                <a:ea typeface="Georgia" pitchFamily="34" charset="-122"/>
-                <a:cs typeface="Georgia" pitchFamily="34" charset="-120"/>
-              </a:rPr>
-              <a:t>Resist ‘it was human error’.   </a:t>
-            </a:r>
-            <a:pPr indent="0" marL="0">
-              <a:lnSpc>
-                <a:spcPct val="112000"/>
-              </a:lnSpc>
-              <a:buNone/>
-            </a:pPr>
-            <a:r>
-              <a:rPr lang="en-US" sz="1250" dirty="0">
-                <a:solidFill>
-                  <a:srgbClr val="6E6A62"/>
-                </a:solidFill>
-                <a:latin typeface="Georgia" pitchFamily="34" charset="0"/>
-                <a:ea typeface="Georgia" pitchFamily="34" charset="-122"/>
-                <a:cs typeface="Georgia" pitchFamily="34" charset="-120"/>
-              </a:rPr>
-              <a:t>That verdict hides the crossing that manufactured the error.</a:t>
-            </a:r>
-            <a:endParaRPr lang="en-US" sz="1450" dirty="0"/>
-          </a:p>
-        </p:txBody>
-      </p:sp>
-      <p:sp>
-        <p:nvSpPr>
-          <p:cNvPr id="13" name="Text 11"/>
-          <p:cNvSpPr/>
-          <p:nvPr/>
-        </p:nvSpPr>
-        <p:spPr>
-          <a:xfrm>
-            <a:off x="566928" y="6473952"/>
-            <a:ext cx="9960559" cy="274320"/>
-          </a:xfrm>
-          <a:prstGeom prst="rect">
-            <a:avLst/>
-          </a:prstGeom>
-          <a:noFill/>
-          <a:ln/>
-        </p:spPr>
-        <p:txBody>
-          <a:bodyPr wrap="square" rtlCol="0" anchor="ctr"/>
-          <a:lstStyle/>
-          <a:p>
-            <a:pPr algn="l" indent="0" marL="0">
-              <a:buNone/>
-            </a:pPr>
-            <a:r>
-              <a:rPr lang="en-US" sz="900" i="1" dirty="0">
-                <a:solidFill>
-                  <a:srgbClr val="6E6A62"/>
-                </a:solidFill>
-                <a:latin typeface="Georgia" pitchFamily="34" charset="0"/>
-                <a:ea typeface="Georgia" pitchFamily="34" charset="-122"/>
-                <a:cs typeface="Georgia" pitchFamily="34" charset="-120"/>
-              </a:rPr>
-              <a:t>What the Structure Does Not Carry</a:t>
-            </a:r>
-            <a:pPr algn="l" indent="0" marL="0">
-              <a:buNone/>
-            </a:pPr>
-            <a:r>
-              <a:rPr lang="en-US" sz="900" dirty="0">
-                <a:solidFill>
-                  <a:srgbClr val="6E6A62"/>
-                </a:solidFill>
-                <a:latin typeface="Georgia" pitchFamily="34" charset="0"/>
-                <a:ea typeface="Georgia" pitchFamily="34" charset="-122"/>
-                <a:cs typeface="Georgia" pitchFamily="34" charset="-120"/>
-              </a:rPr>
-              <a:t>  ·  Professional Certificate — The Custody Architect</a:t>
-            </a:r>
-            <a:endParaRPr lang="en-US" sz="900" dirty="0"/>
-          </a:p>
-        </p:txBody>
-      </p:sp>
-      <p:sp>
-        <p:nvSpPr>
-          <p:cNvPr id="14" name="Text 12"/>
           <p:cNvSpPr/>
           <p:nvPr/>
         </p:nvSpPr>
